--- a/docs/Usuarios Retirados DTU.pptx
+++ b/docs/Usuarios Retirados DTU.pptx
@@ -16,9 +16,13 @@
     <p:sldId id="264" r:id="rId10"/>
     <p:sldId id="265" r:id="rId11"/>
     <p:sldId id="266" r:id="rId12"/>
+    <p:sldId id="273" r:id="rId24"/>
+    <p:sldId id="274" r:id="rId25"/>
+    <p:sldId id="275" r:id="rId26"/>
     <p:sldId id="267" r:id="rId13"/>
     <p:sldId id="268" r:id="rId14"/>
     <p:sldId id="269" r:id="rId15"/>
+    <p:sldId id="276" r:id="rId27"/>
     <p:sldId id="270" r:id="rId16"/>
     <p:sldId id="271" r:id="rId17"/>
     <p:sldId id="272" r:id="rId18"/>
@@ -2539,7 +2543,7 @@
         </p:nvSpPr>
         <p:spPr>
           <a:xfrm>
-            <a:off x="812800" y="1743803"/>
+            <a:off x="812800" y="2096856"/>
             <a:ext cx="6592824" cy="238720"/>
           </a:xfrm>
           <a:prstGeom prst="rect">
@@ -2585,8 +2589,8 @@
         </p:nvSpPr>
         <p:spPr>
           <a:xfrm>
-            <a:off x="812800" y="2160323"/>
-            <a:ext cx="6592824" cy="1412214"/>
+            <a:off x="812800" y="2513376"/>
+            <a:ext cx="6592824" cy="706107"/>
           </a:xfrm>
           <a:prstGeom prst="rect">
             <a:avLst/>
@@ -2615,7 +2619,7 @@
                 <a:ea typeface="IBM Plex Sans" pitchFamily="34" charset="-122"/>
                 <a:cs typeface="IBM Plex Sans" pitchFamily="34" charset="-120"/>
               </a:rPr>
-              <a:t>Usuarios Retirados DTU</a:t>
+              <a:t>PW Extended App</a:t>
             </a:r>
             <a:endParaRPr lang="en-US" sz="5200" dirty="0"/>
           </a:p>
@@ -2629,7 +2633,7 @@
         </p:nvSpPr>
         <p:spPr>
           <a:xfrm>
-            <a:off x="812800" y="3750337"/>
+            <a:off x="812800" y="3397283"/>
             <a:ext cx="6592824" cy="642541"/>
           </a:xfrm>
           <a:prstGeom prst="rect">
@@ -2659,7 +2663,7 @@
                 <a:ea typeface="IBM Plex Sans" pitchFamily="34" charset="-122"/>
                 <a:cs typeface="IBM Plex Sans" pitchFamily="34" charset="-120"/>
               </a:rPr>
-              <a:t>Del reporte semanal por correo al bloqueo verificado en ProWatch, en un solo paso.</a:t>
+              <a:t>Herramientas de Control de Acceso para ProWatch: Usuarios Retirados DTU y Ocupación Edificios en una sola plataforma.</a:t>
             </a:r>
             <a:endParaRPr lang="en-US" sz="1800" dirty="0"/>
           </a:p>
@@ -2673,7 +2677,7 @@
         </p:nvSpPr>
         <p:spPr>
           <a:xfrm>
-            <a:off x="812800" y="4570677"/>
+            <a:off x="812800" y="4217623"/>
             <a:ext cx="1842492" cy="340320"/>
           </a:xfrm>
           <a:prstGeom prst="roundRect">
@@ -3095,7 +3099,7 @@
                 <a:ea typeface="IBM Plex Mono" pitchFamily="49" charset="-122"/>
                 <a:cs typeface="IBM Plex Mono" pitchFamily="49" charset="-120"/>
               </a:rPr>
-              <a:t>FASE 4 DE 5</a:t>
+              <a:t>FASE 4 DE 6</a:t>
             </a:r>
             <a:endParaRPr lang="en-US" sz="1200" dirty="0"/>
           </a:p>
@@ -3535,7 +3539,7 @@
                 <a:ea typeface="IBM Plex Sans" pitchFamily="34" charset="-122"/>
                 <a:cs typeface="IBM Plex Sans" pitchFamily="34" charset="-120"/>
               </a:rPr>
-              <a:t>Usuarios Retirados DTU · Iniciativa en desarrollo</a:t>
+              <a:t>PW Extended App · Iniciativa en desarrollo</a:t>
             </a:r>
             <a:endParaRPr lang="en-US" sz="1200" dirty="0"/>
           </a:p>
@@ -3655,7 +3659,7 @@
                 <a:ea typeface="IBM Plex Mono" pitchFamily="49" charset="-122"/>
                 <a:cs typeface="IBM Plex Mono" pitchFamily="49" charset="-120"/>
               </a:rPr>
-              <a:t>FASE 5 DE 5</a:t>
+              <a:t>FASE 5 DE 6</a:t>
             </a:r>
             <a:endParaRPr lang="en-US" sz="1200" dirty="0"/>
           </a:p>
@@ -4095,7 +4099,7 @@
                 <a:ea typeface="IBM Plex Sans" pitchFamily="34" charset="-122"/>
                 <a:cs typeface="IBM Plex Sans" pitchFamily="34" charset="-120"/>
               </a:rPr>
-              <a:t>Usuarios Retirados DTU · Iniciativa en desarrollo</a:t>
+              <a:t>PW Extended App · Iniciativa en desarrollo</a:t>
             </a:r>
             <a:endParaRPr lang="en-US" sz="1200" dirty="0"/>
           </a:p>
@@ -6622,7 +6626,7 @@
                 <a:ea typeface="IBM Plex Sans" pitchFamily="34" charset="-122"/>
                 <a:cs typeface="IBM Plex Sans" pitchFamily="34" charset="-120"/>
               </a:rPr>
-              <a:t>Usuarios Retirados DTU · Iniciativa en desarrollo</a:t>
+              <a:t>PW Extended App · Iniciativa en desarrollo</a:t>
             </a:r>
             <a:endParaRPr lang="en-US" sz="1200" dirty="0"/>
           </a:p>
@@ -6666,7 +6670,7 @@
                 <a:ea typeface="IBM Plex Sans" pitchFamily="34" charset="-122"/>
                 <a:cs typeface="IBM Plex Sans" pitchFamily="34" charset="-120"/>
               </a:rPr>
-              <a:t>12</a:t>
+              <a:t>15</a:t>
             </a:r>
             <a:endParaRPr lang="en-US" sz="1200" dirty="0"/>
           </a:p>
@@ -8363,7 +8367,7 @@
                 <a:ea typeface="IBM Plex Sans" pitchFamily="34" charset="-122"/>
                 <a:cs typeface="IBM Plex Sans" pitchFamily="34" charset="-120"/>
               </a:rPr>
-              <a:t>Usuarios Retirados DTU · Iniciativa en desarrollo</a:t>
+              <a:t>PW Extended App · Iniciativa en desarrollo</a:t>
             </a:r>
             <a:endParaRPr lang="en-US" sz="1200" dirty="0"/>
           </a:p>
@@ -8407,7 +8411,7 @@
                 <a:ea typeface="IBM Plex Sans" pitchFamily="34" charset="-122"/>
                 <a:cs typeface="IBM Plex Sans" pitchFamily="34" charset="-120"/>
               </a:rPr>
-              <a:t>13</a:t>
+              <a:t>16</a:t>
             </a:r>
             <a:endParaRPr lang="en-US" sz="1200" dirty="0"/>
           </a:p>
@@ -10836,7 +10840,7 @@
                 <a:ea typeface="IBM Plex Sans" pitchFamily="34" charset="-122"/>
                 <a:cs typeface="IBM Plex Sans" pitchFamily="34" charset="-120"/>
               </a:rPr>
-              <a:t>Usuarios Retirados DTU · Iniciativa en desarrollo</a:t>
+              <a:t>PW Extended App · Iniciativa en desarrollo</a:t>
             </a:r>
             <a:endParaRPr lang="en-US" sz="1200" dirty="0"/>
           </a:p>
@@ -10880,7 +10884,7 @@
                 <a:ea typeface="IBM Plex Sans" pitchFamily="34" charset="-122"/>
                 <a:cs typeface="IBM Plex Sans" pitchFamily="34" charset="-120"/>
               </a:rPr>
-              <a:t>14</a:t>
+              <a:t>17</a:t>
             </a:r>
             <a:endParaRPr lang="en-US" sz="1200" dirty="0"/>
           </a:p>
@@ -12701,7 +12705,7 @@
                 <a:ea typeface="IBM Plex Sans" pitchFamily="34" charset="-122"/>
                 <a:cs typeface="IBM Plex Sans" pitchFamily="34" charset="-120"/>
               </a:rPr>
-              <a:t>Usuarios Retirados DTU · Iniciativa en desarrollo</a:t>
+              <a:t>PW Extended App · Iniciativa en desarrollo</a:t>
             </a:r>
             <a:endParaRPr lang="en-US" sz="1200" dirty="0"/>
           </a:p>
@@ -12745,7 +12749,7 @@
                 <a:ea typeface="IBM Plex Sans" pitchFamily="34" charset="-122"/>
                 <a:cs typeface="IBM Plex Sans" pitchFamily="34" charset="-120"/>
               </a:rPr>
-              <a:t>15</a:t>
+              <a:t>19</a:t>
             </a:r>
             <a:endParaRPr lang="en-US" sz="1200" dirty="0"/>
           </a:p>
@@ -12962,7 +12966,7 @@
                 <a:ea typeface="IBM Plex Sans" pitchFamily="34" charset="-122"/>
                 <a:cs typeface="IBM Plex Sans" pitchFamily="34" charset="-120"/>
               </a:rPr>
-              <a:t>Script de los 5 días</a:t>
+              <a:t>Script de los 5 días y motor DTU</a:t>
             </a:r>
             <a:endParaRPr lang="en-US" sz="1300" dirty="0"/>
           </a:p>
@@ -12983,7 +12987,7 @@
                 <a:ea typeface="IBM Plex Sans" pitchFamily="34" charset="-122"/>
                 <a:cs typeface="IBM Plex Sans" pitchFamily="34" charset="-120"/>
               </a:rPr>
-              <a:t>Motor de filtrado y formato DTU</a:t>
+              <a:t>App web con Lista VIP e historial</a:t>
             </a:r>
             <a:endParaRPr lang="en-US" sz="1300" dirty="0"/>
           </a:p>
@@ -13004,7 +13008,7 @@
                 <a:ea typeface="IBM Plex Sans" pitchFamily="34" charset="-122"/>
                 <a:cs typeface="IBM Plex Sans" pitchFamily="34" charset="-120"/>
               </a:rPr>
-              <a:t>App web con Lista VIP e historial</a:t>
+              <a:t>Módulo Ocupación Edificios</a:t>
             </a:r>
             <a:endParaRPr lang="en-US" sz="1300" dirty="0"/>
           </a:p>
@@ -13025,7 +13029,7 @@
                 <a:ea typeface="IBM Plex Sans" pitchFamily="34" charset="-122"/>
                 <a:cs typeface="IBM Plex Sans" pitchFamily="34" charset="-120"/>
               </a:rPr>
-              <a:t>Paquete de instalación seguro</a:t>
+              <a:t>Seguridad, pruebas y respaldos</a:t>
             </a:r>
             <a:endParaRPr lang="en-US" sz="1300" dirty="0"/>
           </a:p>
@@ -13387,7 +13391,7 @@
                 <a:ea typeface="IBM Plex Sans" pitchFamily="34" charset="-122"/>
                 <a:cs typeface="IBM Plex Sans" pitchFamily="34" charset="-120"/>
               </a:rPr>
-              <a:t>Indicadores desde el historial</a:t>
+              <a:t>Alerta si un retirado sigue marcando</a:t>
             </a:r>
             <a:endParaRPr lang="en-US" sz="1300" dirty="0"/>
           </a:p>
@@ -13431,7 +13435,7 @@
                 <a:ea typeface="IBM Plex Sans" pitchFamily="34" charset="-122"/>
                 <a:cs typeface="IBM Plex Sans" pitchFamily="34" charset="-120"/>
               </a:rPr>
-              <a:t>Usuarios Retirados DTU · Iniciativa en desarrollo</a:t>
+              <a:t>PW Extended App · Iniciativa en desarrollo</a:t>
             </a:r>
             <a:endParaRPr lang="en-US" sz="1200" dirty="0"/>
           </a:p>
@@ -13475,7 +13479,7 @@
                 <a:ea typeface="IBM Plex Sans" pitchFamily="34" charset="-122"/>
                 <a:cs typeface="IBM Plex Sans" pitchFamily="34" charset="-120"/>
               </a:rPr>
-              <a:t>16</a:t>
+              <a:t>20</a:t>
             </a:r>
             <a:endParaRPr lang="en-US" sz="1200" dirty="0"/>
           </a:p>
@@ -14044,6 +14048,1638 @@
 </p:sld>
 </file>
 
+<file path=ppt/slides/slide18.xml><?xml version="1.0" encoding="utf-8"?>
+<p:sld xmlns:a="http://schemas.openxmlformats.org/drawingml/2006/main" xmlns:r="http://schemas.openxmlformats.org/officeDocument/2006/relationships" xmlns:p="http://schemas.openxmlformats.org/presentationml/2006/main">
+  <p:cSld name="Slide 11">
+    <p:bg>
+      <p:bgPr>
+        <a:solidFill>
+          <a:srgbClr val="F4F6F9"/>
+        </a:solidFill>
+      </p:bgPr>
+    </p:bg>
+    <p:spTree>
+      <p:nvGrpSpPr>
+        <p:cNvPr id="1" name=""/>
+        <p:cNvGrpSpPr/>
+        <p:nvPr/>
+      </p:nvGrpSpPr>
+      <p:grpSpPr>
+        <a:xfrm>
+          <a:off x="0" y="0"/>
+          <a:ext cx="0" cy="0"/>
+          <a:chOff x="0" y="0"/>
+          <a:chExt cx="0" cy="0"/>
+        </a:xfrm>
+      </p:grpSpPr>
+      <p:sp>
+        <p:nvSpPr>
+          <p:cNvPr id="2" name="Text 0"/>
+          <p:cNvSpPr/>
+          <p:nvPr/>
+        </p:nvSpPr>
+        <p:spPr>
+          <a:xfrm>
+            <a:off x="812800" y="812800"/>
+            <a:ext cx="10883392" cy="238720"/>
+          </a:xfrm>
+          <a:prstGeom prst="rect">
+            <a:avLst/>
+          </a:prstGeom>
+          <a:noFill/>
+          <a:ln/>
+        </p:spPr>
+        <p:txBody>
+          <a:bodyPr wrap="square" lIns="0" tIns="0" rIns="0" bIns="0" rtlCol="0" anchor="t">
+            <a:normAutofit/>
+          </a:bodyPr>
+          <a:lstStyle/>
+          <a:p>
+            <a:pPr algn="l" indent="0" marL="0">
+              <a:lnSpc>
+                <a:spcPts val="1680"/>
+              </a:lnSpc>
+              <a:buNone/>
+            </a:pPr>
+            <a:r>
+              <a:rPr lang="en-US" sz="1200" b="1" spc="100" kern="0" dirty="0">
+                <a:solidFill>
+                  <a:srgbClr val="0369A1"/>
+                </a:solidFill>
+                <a:latin typeface="IBM Plex Mono" pitchFamily="49" charset="0"/>
+                <a:ea typeface="IBM Plex Mono" pitchFamily="49" charset="-122"/>
+                <a:cs typeface="IBM Plex Mono" pitchFamily="49" charset="-120"/>
+              </a:rPr>
+              <a:t>FASE 6 DE 6</a:t>
+            </a:r>
+            <a:endParaRPr lang="en-US" sz="1200" dirty="0"/>
+          </a:p>
+        </p:txBody>
+      </p:sp>
+      <p:sp>
+        <p:nvSpPr>
+          <p:cNvPr id="3" name="Text 1"/>
+          <p:cNvSpPr/>
+          <p:nvPr>
+            <p:ph type="title"/>
+          </p:nvPr>
+        </p:nvSpPr>
+        <p:spPr>
+          <a:xfrm>
+            <a:off x="812800" y="1127720"/>
+            <a:ext cx="10883392" cy="492720"/>
+          </a:xfrm>
+          <a:prstGeom prst="rect">
+            <a:avLst/>
+          </a:prstGeom>
+          <a:noFill/>
+          <a:ln/>
+        </p:spPr>
+        <p:txBody>
+          <a:bodyPr wrap="square" lIns="0" tIns="0" rIns="0" bIns="0" rtlCol="0" anchor="t">
+            <a:normAutofit/>
+          </a:bodyPr>
+          <a:lstStyle/>
+          <a:p>
+            <a:pPr algn="l" indent="0" marL="0">
+              <a:lnSpc>
+                <a:spcPts val="3680"/>
+              </a:lnSpc>
+              <a:buNone/>
+            </a:pPr>
+            <a:r>
+              <a:rPr lang="en-US" sz="3200" b="1" i="0" dirty="0">
+                <a:solidFill>
+                  <a:srgbClr val="0E1A2B"/>
+                </a:solidFill>
+                <a:latin typeface="IBM Plex Sans" pitchFamily="34" charset="0"/>
+                <a:ea typeface="IBM Plex Sans" pitchFamily="34" charset="-122"/>
+                <a:cs typeface="IBM Plex Sans" pitchFamily="34" charset="-120"/>
+              </a:rPr>
+              <a:t>Una plataforma por módulos</a:t>
+            </a:r>
+            <a:endParaRPr lang="en-US" sz="3200" dirty="0"/>
+          </a:p>
+        </p:txBody>
+      </p:sp>
+      <p:sp>
+        <p:nvSpPr>
+          <p:cNvPr id="4" name="Text 2"/>
+          <p:cNvSpPr/>
+          <p:nvPr/>
+        </p:nvSpPr>
+        <p:spPr>
+          <a:xfrm>
+            <a:off x="812800" y="1849041"/>
+            <a:ext cx="6514338" cy="238720"/>
+          </a:xfrm>
+          <a:prstGeom prst="rect">
+            <a:avLst/>
+          </a:prstGeom>
+          <a:noFill/>
+          <a:ln/>
+        </p:spPr>
+        <p:txBody>
+          <a:bodyPr wrap="square" lIns="0" tIns="0" rIns="0" bIns="0" rtlCol="0" anchor="t">
+            <a:normAutofit/>
+          </a:bodyPr>
+          <a:lstStyle/>
+          <a:p>
+            <a:pPr algn="l" indent="0" marL="0">
+              <a:lnSpc>
+                <a:spcPts val="1680"/>
+              </a:lnSpc>
+              <a:buNone/>
+            </a:pPr>
+            <a:r>
+              <a:rPr lang="en-US" sz="1200" dirty="0">
+                <a:solidFill>
+                  <a:srgbClr val="0369A1"/>
+                </a:solidFill>
+                <a:latin typeface="IBM Plex Mono" pitchFamily="49" charset="0"/>
+                <a:ea typeface="IBM Plex Mono" pitchFamily="49" charset="-122"/>
+                <a:cs typeface="IBM Plex Mono" pitchFamily="49" charset="-120"/>
+              </a:rPr>
+              <a:t>QUÉ HACE</a:t>
+            </a:r>
+            <a:endParaRPr lang="en-US" sz="1200" dirty="0"/>
+          </a:p>
+        </p:txBody>
+      </p:sp>
+      <p:sp>
+        <p:nvSpPr>
+          <p:cNvPr id="5" name="Text 3"/>
+          <p:cNvSpPr/>
+          <p:nvPr/>
+        </p:nvSpPr>
+        <p:spPr>
+          <a:xfrm>
+            <a:off x="812800" y="2138561"/>
+            <a:ext cx="6514338" cy="558800"/>
+          </a:xfrm>
+          <a:prstGeom prst="rect">
+            <a:avLst/>
+          </a:prstGeom>
+          <a:noFill/>
+          <a:ln/>
+        </p:spPr>
+        <p:txBody>
+          <a:bodyPr wrap="square" lIns="0" tIns="0" rIns="0" bIns="0" rtlCol="0" anchor="t">
+            <a:normAutofit/>
+          </a:bodyPr>
+          <a:lstStyle/>
+          <a:p>
+            <a:pPr algn="l" indent="0" marL="0">
+              <a:lnSpc>
+                <a:spcPts val="2100"/>
+              </a:lnSpc>
+              <a:buNone/>
+            </a:pPr>
+            <a:r>
+              <a:rPr lang="en-US" sz="1500" dirty="0">
+                <a:solidFill>
+                  <a:srgbClr val="3E4C5E"/>
+                </a:solidFill>
+                <a:latin typeface="IBM Plex Sans" pitchFamily="34" charset="0"/>
+                <a:ea typeface="IBM Plex Sans" pitchFamily="34" charset="-122"/>
+                <a:cs typeface="IBM Plex Sans" pitchFamily="34" charset="-120"/>
+              </a:rPr>
+              <a:t>Reúne en una sola app, con un mismo ingreso y menú, Usuarios Retirados DTU y Ocupación Edificios, y deja la base lista para sumar módulos.</a:t>
+            </a:r>
+            <a:endParaRPr lang="en-US" sz="1500" dirty="0"/>
+          </a:p>
+        </p:txBody>
+      </p:sp>
+      <p:sp>
+        <p:nvSpPr>
+          <p:cNvPr id="6" name="Text 4"/>
+          <p:cNvSpPr/>
+          <p:nvPr/>
+        </p:nvSpPr>
+        <p:spPr>
+          <a:xfrm>
+            <a:off x="812800" y="2875161"/>
+            <a:ext cx="6514338" cy="238720"/>
+          </a:xfrm>
+          <a:prstGeom prst="rect">
+            <a:avLst/>
+          </a:prstGeom>
+          <a:noFill/>
+          <a:ln/>
+        </p:spPr>
+        <p:txBody>
+          <a:bodyPr wrap="square" lIns="0" tIns="0" rIns="0" bIns="0" rtlCol="0" anchor="t">
+            <a:normAutofit/>
+          </a:bodyPr>
+          <a:lstStyle/>
+          <a:p>
+            <a:pPr algn="l" indent="0" marL="0">
+              <a:lnSpc>
+                <a:spcPts val="1680"/>
+              </a:lnSpc>
+              <a:buNone/>
+            </a:pPr>
+            <a:r>
+              <a:rPr lang="en-US" sz="1200" dirty="0">
+                <a:solidFill>
+                  <a:srgbClr val="B4501A"/>
+                </a:solidFill>
+                <a:latin typeface="IBM Plex Mono" pitchFamily="49" charset="0"/>
+                <a:ea typeface="IBM Plex Mono" pitchFamily="49" charset="-122"/>
+                <a:cs typeface="IBM Plex Mono" pitchFamily="49" charset="-120"/>
+              </a:rPr>
+              <a:t>QUÉ PROBLEMA ATACA</a:t>
+            </a:r>
+            <a:endParaRPr lang="en-US" sz="1200" dirty="0"/>
+          </a:p>
+        </p:txBody>
+      </p:sp>
+      <p:sp>
+        <p:nvSpPr>
+          <p:cNvPr id="7" name="Text 5"/>
+          <p:cNvSpPr/>
+          <p:nvPr/>
+        </p:nvSpPr>
+        <p:spPr>
+          <a:xfrm>
+            <a:off x="812800" y="3164681"/>
+            <a:ext cx="6514338" cy="558800"/>
+          </a:xfrm>
+          <a:prstGeom prst="rect">
+            <a:avLst/>
+          </a:prstGeom>
+          <a:noFill/>
+          <a:ln/>
+        </p:spPr>
+        <p:txBody>
+          <a:bodyPr wrap="square" lIns="0" tIns="0" rIns="0" bIns="0" rtlCol="0" anchor="t">
+            <a:normAutofit/>
+          </a:bodyPr>
+          <a:lstStyle/>
+          <a:p>
+            <a:pPr algn="l" indent="0" marL="0">
+              <a:lnSpc>
+                <a:spcPts val="2100"/>
+              </a:lnSpc>
+              <a:buNone/>
+            </a:pPr>
+            <a:r>
+              <a:rPr lang="en-US" sz="1500" dirty="0">
+                <a:solidFill>
+                  <a:srgbClr val="3E4C5E"/>
+                </a:solidFill>
+                <a:latin typeface="IBM Plex Sans" pitchFamily="34" charset="0"/>
+                <a:ea typeface="IBM Plex Sans" pitchFamily="34" charset="-122"/>
+                <a:cs typeface="IBM Plex Sans" pitchFamily="34" charset="-120"/>
+              </a:rPr>
+              <a:t>Cada herramienta nueva ya no necesita su propio servidor, usuarios ni instalación: se agrega como un módulo más.</a:t>
+            </a:r>
+            <a:endParaRPr lang="en-US" sz="1500" dirty="0"/>
+          </a:p>
+        </p:txBody>
+      </p:sp>
+      <p:sp>
+        <p:nvSpPr>
+          <p:cNvPr id="8" name="Shape 6"/>
+          <p:cNvSpPr/>
+          <p:nvPr/>
+        </p:nvSpPr>
+        <p:spPr>
+          <a:xfrm>
+            <a:off x="7442200" y="1849041"/>
+            <a:ext cx="3937000" cy="2556470"/>
+          </a:xfrm>
+          <a:prstGeom prst="roundRect">
+            <a:avLst>
+              <a:gd name="adj" fmla="val 3974"/>
+            </a:avLst>
+          </a:prstGeom>
+          <a:solidFill>
+            <a:srgbClr val="0E1A2B"/>
+          </a:solidFill>
+          <a:ln/>
+        </p:spPr>
+      </p:sp>
+      <p:sp>
+        <p:nvSpPr>
+          <p:cNvPr id="9" name="Text 7"/>
+          <p:cNvSpPr/>
+          <p:nvPr/>
+        </p:nvSpPr>
+        <p:spPr>
+          <a:xfrm>
+            <a:off x="7696200" y="2103041"/>
+            <a:ext cx="3531870" cy="238720"/>
+          </a:xfrm>
+          <a:prstGeom prst="rect">
+            <a:avLst/>
+          </a:prstGeom>
+          <a:noFill/>
+          <a:ln/>
+        </p:spPr>
+        <p:txBody>
+          <a:bodyPr wrap="square" lIns="0" tIns="0" rIns="0" bIns="0" rtlCol="0" anchor="t">
+            <a:normAutofit/>
+          </a:bodyPr>
+          <a:lstStyle/>
+          <a:p>
+            <a:pPr algn="l" indent="0" marL="0">
+              <a:lnSpc>
+                <a:spcPts val="1680"/>
+              </a:lnSpc>
+              <a:buNone/>
+            </a:pPr>
+            <a:r>
+              <a:rPr lang="en-US" sz="1200" dirty="0">
+                <a:solidFill>
+                  <a:srgbClr val="38BDF8"/>
+                </a:solidFill>
+                <a:latin typeface="IBM Plex Mono" pitchFamily="49" charset="0"/>
+                <a:ea typeface="IBM Plex Mono" pitchFamily="49" charset="-122"/>
+                <a:cs typeface="IBM Plex Mono" pitchFamily="49" charset="-120"/>
+              </a:rPr>
+              <a:t>DETALLE TÉCNICO</a:t>
+            </a:r>
+            <a:endParaRPr lang="en-US" sz="1200" dirty="0"/>
+          </a:p>
+        </p:txBody>
+      </p:sp>
+      <p:sp>
+        <p:nvSpPr>
+          <p:cNvPr id="10" name="Text 8"/>
+          <p:cNvSpPr/>
+          <p:nvPr/>
+        </p:nvSpPr>
+        <p:spPr>
+          <a:xfrm>
+            <a:off x="7781544" y="2417961"/>
+            <a:ext cx="3438906" cy="1758950"/>
+          </a:xfrm>
+          <a:prstGeom prst="rect">
+            <a:avLst/>
+          </a:prstGeom>
+          <a:noFill/>
+          <a:ln/>
+        </p:spPr>
+        <p:txBody>
+          <a:bodyPr wrap="square" lIns="0" tIns="0" rIns="0" bIns="0" rtlCol="0" anchor="t">
+            <a:normAutofit/>
+          </a:bodyPr>
+          <a:lstStyle/>
+          <a:p>
+            <a:pPr algn="l" marL="168656" indent="-168656">
+              <a:lnSpc>
+                <a:spcPts val="1950"/>
+              </a:lnSpc>
+              <a:buSzPct val="100000"/>
+              <a:buChar char="•"/>
+            </a:pPr>
+            <a:r>
+              <a:rPr lang="en-US" sz="1300" dirty="0">
+                <a:solidFill>
+                  <a:srgbClr val="B9C6D6"/>
+                </a:solidFill>
+                <a:latin typeface="IBM Plex Sans" pitchFamily="34" charset="0"/>
+                <a:ea typeface="IBM Plex Sans" pitchFamily="34" charset="-122"/>
+                <a:cs typeface="IBM Plex Sans" pitchFamily="34" charset="-120"/>
+              </a:rPr>
+              <a:t>Menú por módulos; cada pantalla con su enlace.</a:t>
+            </a:r>
+            <a:endParaRPr lang="en-US" sz="1300" dirty="0"/>
+          </a:p>
+          <a:p>
+            <a:pPr algn="l" marL="168656" indent="-168656">
+              <a:lnSpc>
+                <a:spcPts val="1950"/>
+              </a:lnSpc>
+              <a:buSzPct val="100000"/>
+              <a:buChar char="•"/>
+            </a:pPr>
+            <a:r>
+              <a:rPr lang="en-US" sz="1300" dirty="0">
+                <a:solidFill>
+                  <a:srgbClr val="B9C6D6"/>
+                </a:solidFill>
+                <a:latin typeface="IBM Plex Sans" pitchFamily="34" charset="0"/>
+                <a:ea typeface="IBM Plex Sans" pitchFamily="34" charset="-122"/>
+                <a:cs typeface="IBM Plex Sans" pitchFamily="34" charset="-120"/>
+              </a:rPr>
+              <a:t>Ocupación migrado desde Python, sin perder datos.</a:t>
+            </a:r>
+            <a:endParaRPr lang="en-US" sz="1300" dirty="0"/>
+          </a:p>
+          <a:p>
+            <a:pPr algn="l" marL="168656" indent="-168656">
+              <a:lnSpc>
+                <a:spcPts val="1950"/>
+              </a:lnSpc>
+              <a:buSzPct val="100000"/>
+              <a:buChar char="•"/>
+            </a:pPr>
+            <a:r>
+              <a:rPr lang="en-US" sz="1300" dirty="0">
+                <a:solidFill>
+                  <a:srgbClr val="B9C6D6"/>
+                </a:solidFill>
+                <a:latin typeface="IBM Plex Sans" pitchFamily="34" charset="0"/>
+                <a:ea typeface="IBM Plex Sans" pitchFamily="34" charset="-122"/>
+                <a:cs typeface="IBM Plex Sans" pitchFamily="34" charset="-120"/>
+              </a:rPr>
+              <a:t>Mismos permisos, bitácora y respaldos.</a:t>
+            </a:r>
+            <a:endParaRPr lang="en-US" sz="1300" dirty="0"/>
+          </a:p>
+          <a:p>
+            <a:pPr algn="l" marL="168656" indent="-168656">
+              <a:lnSpc>
+                <a:spcPts val="1950"/>
+              </a:lnSpc>
+              <a:buSzPct val="100000"/>
+              <a:buChar char="•"/>
+            </a:pPr>
+            <a:r>
+              <a:rPr lang="en-US" sz="1300" dirty="0">
+                <a:solidFill>
+                  <a:srgbClr val="B9C6D6"/>
+                </a:solidFill>
+                <a:latin typeface="IBM Plex Sans" pitchFamily="34" charset="0"/>
+                <a:ea typeface="IBM Plex Sans" pitchFamily="34" charset="-122"/>
+                <a:cs typeface="IBM Plex Sans" pitchFamily="34" charset="-120"/>
+              </a:rPr>
+              <a:t>Nuevo módulo: una pantalla y un archivo.</a:t>
+            </a:r>
+            <a:endParaRPr lang="en-US" sz="1300" dirty="0"/>
+          </a:p>
+        </p:txBody>
+      </p:sp>
+      <p:sp>
+        <p:nvSpPr>
+          <p:cNvPr id="11" name="Text 9"/>
+          <p:cNvSpPr/>
+          <p:nvPr/>
+        </p:nvSpPr>
+        <p:spPr>
+          <a:xfrm>
+            <a:off x="812800" y="6238280"/>
+            <a:ext cx="3958273" cy="238720"/>
+          </a:xfrm>
+          <a:prstGeom prst="rect">
+            <a:avLst/>
+          </a:prstGeom>
+          <a:noFill/>
+          <a:ln/>
+        </p:spPr>
+        <p:txBody>
+          <a:bodyPr wrap="square" lIns="0" tIns="0" rIns="0" bIns="0" rtlCol="0" anchor="t">
+            <a:normAutofit/>
+          </a:bodyPr>
+          <a:lstStyle/>
+          <a:p>
+            <a:pPr algn="l" indent="0" marL="0">
+              <a:lnSpc>
+                <a:spcPts val="1680"/>
+              </a:lnSpc>
+              <a:buNone/>
+            </a:pPr>
+            <a:r>
+              <a:rPr lang="en-US" sz="1200" dirty="0">
+                <a:solidFill>
+                  <a:srgbClr val="66758A"/>
+                </a:solidFill>
+                <a:latin typeface="IBM Plex Sans" pitchFamily="34" charset="0"/>
+                <a:ea typeface="IBM Plex Sans" pitchFamily="34" charset="-122"/>
+                <a:cs typeface="IBM Plex Sans" pitchFamily="34" charset="-120"/>
+              </a:rPr>
+              <a:t>PW Extended App · Iniciativa en desarrollo</a:t>
+            </a:r>
+            <a:endParaRPr lang="en-US" sz="1200" dirty="0"/>
+          </a:p>
+        </p:txBody>
+      </p:sp>
+      <p:sp>
+        <p:nvSpPr>
+          <p:cNvPr id="12" name="Text 10"/>
+          <p:cNvSpPr/>
+          <p:nvPr/>
+        </p:nvSpPr>
+        <p:spPr>
+          <a:xfrm>
+            <a:off x="11145507" y="6238280"/>
+            <a:ext cx="233693" cy="238720"/>
+          </a:xfrm>
+          <a:prstGeom prst="rect">
+            <a:avLst/>
+          </a:prstGeom>
+          <a:noFill/>
+          <a:ln/>
+        </p:spPr>
+        <p:txBody>
+          <a:bodyPr wrap="square" lIns="0" tIns="0" rIns="0" bIns="0" rtlCol="0" anchor="t">
+            <a:normAutofit/>
+          </a:bodyPr>
+          <a:lstStyle/>
+          <a:p>
+            <a:pPr algn="r" indent="0" marL="0">
+              <a:lnSpc>
+                <a:spcPts val="1680"/>
+              </a:lnSpc>
+              <a:buNone/>
+            </a:pPr>
+            <a:r>
+              <a:rPr lang="en-US" sz="1200" dirty="0">
+                <a:solidFill>
+                  <a:srgbClr val="66758A"/>
+                </a:solidFill>
+                <a:latin typeface="IBM Plex Sans" pitchFamily="34" charset="0"/>
+                <a:ea typeface="IBM Plex Sans" pitchFamily="34" charset="-122"/>
+                <a:cs typeface="IBM Plex Sans" pitchFamily="34" charset="-120"/>
+              </a:rPr>
+              <a:t>12</a:t>
+            </a:r>
+            <a:endParaRPr lang="en-US" sz="1200" dirty="0"/>
+          </a:p>
+        </p:txBody>
+      </p:sp>
+    </p:spTree>
+  </p:cSld>
+  <p:clrMapOvr>
+    <a:masterClrMapping/>
+  </p:clrMapOvr>
+</p:sld>
+</file>
+
+<file path=ppt/slides/slide19.xml><?xml version="1.0" encoding="utf-8"?>
+<p:sld xmlns:a="http://schemas.openxmlformats.org/drawingml/2006/main" xmlns:r="http://schemas.openxmlformats.org/officeDocument/2006/relationships" xmlns:p="http://schemas.openxmlformats.org/presentationml/2006/main">
+  <p:cSld name="Slide 5">
+    <p:bg>
+      <p:bgPr>
+        <a:solidFill>
+          <a:srgbClr val="0E1A2B"/>
+        </a:solidFill>
+      </p:bgPr>
+    </p:bg>
+    <p:spTree>
+      <p:nvGrpSpPr>
+        <p:cNvPr id="1" name=""/>
+        <p:cNvGrpSpPr/>
+        <p:nvPr/>
+      </p:nvGrpSpPr>
+      <p:grpSpPr>
+        <a:xfrm>
+          <a:off x="0" y="0"/>
+          <a:ext cx="0" cy="0"/>
+          <a:chOff x="0" y="0"/>
+          <a:chExt cx="0" cy="0"/>
+        </a:xfrm>
+      </p:grpSpPr>
+      <p:sp>
+        <p:nvSpPr>
+          <p:cNvPr id="2" name="Text 0"/>
+          <p:cNvSpPr/>
+          <p:nvPr>
+            <p:ph type="title"/>
+          </p:nvPr>
+        </p:nvSpPr>
+        <p:spPr>
+          <a:xfrm>
+            <a:off x="812800" y="812800"/>
+            <a:ext cx="10883392" cy="492720"/>
+          </a:xfrm>
+          <a:prstGeom prst="rect">
+            <a:avLst/>
+          </a:prstGeom>
+          <a:noFill/>
+          <a:ln/>
+        </p:spPr>
+        <p:txBody>
+          <a:bodyPr wrap="square" lIns="0" tIns="0" rIns="0" bIns="0" rtlCol="0" anchor="t">
+            <a:normAutofit/>
+          </a:bodyPr>
+          <a:lstStyle/>
+          <a:p>
+            <a:pPr algn="l" indent="0" marL="0">
+              <a:lnSpc>
+                <a:spcPts val="3680"/>
+              </a:lnSpc>
+              <a:buNone/>
+            </a:pPr>
+            <a:r>
+              <a:rPr lang="en-US" sz="3200" b="1" i="0" dirty="0">
+                <a:solidFill>
+                  <a:srgbClr val="F4F6F9"/>
+                </a:solidFill>
+                <a:latin typeface="IBM Plex Sans" pitchFamily="34" charset="0"/>
+                <a:ea typeface="IBM Plex Sans" pitchFamily="34" charset="-122"/>
+                <a:cs typeface="IBM Plex Sans" pitchFamily="34" charset="-120"/>
+              </a:rPr>
+              <a:t>Módulo 2: Ocupación Edificios</a:t>
+            </a:r>
+            <a:endParaRPr lang="en-US" sz="3200" dirty="0"/>
+          </a:p>
+        </p:txBody>
+      </p:sp>
+      <p:sp>
+        <p:nvSpPr>
+          <p:cNvPr id="3" name="Shape 1"/>
+          <p:cNvSpPr/>
+          <p:nvPr/>
+        </p:nvSpPr>
+        <p:spPr>
+          <a:xfrm>
+            <a:off x="815975" y="1588095"/>
+            <a:ext cx="2254250" cy="2115145"/>
+          </a:xfrm>
+          <a:prstGeom prst="roundRect">
+            <a:avLst>
+              <a:gd name="adj" fmla="val 4653"/>
+            </a:avLst>
+          </a:prstGeom>
+          <a:solidFill>
+            <a:srgbClr val="14263D"/>
+          </a:solidFill>
+          <a:ln w="6350">
+            <a:solidFill>
+              <a:srgbClr val="24405F"/>
+            </a:solidFill>
+            <a:prstDash val="solid"/>
+          </a:ln>
+        </p:spPr>
+      </p:sp>
+      <p:sp>
+        <p:nvSpPr>
+          <p:cNvPr id="4" name="Text 2"/>
+          <p:cNvSpPr/>
+          <p:nvPr/>
+        </p:nvSpPr>
+        <p:spPr>
+          <a:xfrm>
+            <a:off x="1020233" y="1792356"/>
+            <a:ext cx="1901105" cy="238720"/>
+          </a:xfrm>
+          <a:prstGeom prst="rect">
+            <a:avLst/>
+          </a:prstGeom>
+          <a:noFill/>
+          <a:ln/>
+        </p:spPr>
+        <p:txBody>
+          <a:bodyPr wrap="square" lIns="0" tIns="0" rIns="0" bIns="0" rtlCol="0" anchor="t">
+            <a:normAutofit/>
+          </a:bodyPr>
+          <a:lstStyle/>
+          <a:p>
+            <a:pPr algn="l" indent="0" marL="0">
+              <a:lnSpc>
+                <a:spcPts val="1680"/>
+              </a:lnSpc>
+              <a:buNone/>
+            </a:pPr>
+            <a:r>
+              <a:rPr lang="en-US" sz="1200" dirty="0">
+                <a:solidFill>
+                  <a:srgbClr val="38BDF8"/>
+                </a:solidFill>
+                <a:latin typeface="IBM Plex Mono" pitchFamily="49" charset="0"/>
+                <a:ea typeface="IBM Plex Mono" pitchFamily="49" charset="-122"/>
+                <a:cs typeface="IBM Plex Mono" pitchFamily="49" charset="-120"/>
+              </a:rPr>
+              <a:t>PASO 1</a:t>
+            </a:r>
+            <a:endParaRPr lang="en-US" sz="1200" dirty="0"/>
+          </a:p>
+        </p:txBody>
+      </p:sp>
+      <p:sp>
+        <p:nvSpPr>
+          <p:cNvPr id="5" name="Text 3"/>
+          <p:cNvSpPr/>
+          <p:nvPr/>
+        </p:nvSpPr>
+        <p:spPr>
+          <a:xfrm>
+            <a:off x="1020233" y="2081876"/>
+            <a:ext cx="1901105" cy="513027"/>
+          </a:xfrm>
+          <a:prstGeom prst="rect">
+            <a:avLst/>
+          </a:prstGeom>
+          <a:noFill/>
+          <a:ln/>
+        </p:spPr>
+        <p:txBody>
+          <a:bodyPr wrap="square" lIns="0" tIns="0" rIns="0" bIns="0" rtlCol="0" anchor="t">
+            <a:normAutofit/>
+          </a:bodyPr>
+          <a:lstStyle/>
+          <a:p>
+            <a:pPr algn="l" indent="0" marL="0">
+              <a:lnSpc>
+                <a:spcPts val="1920"/>
+              </a:lnSpc>
+              <a:buNone/>
+            </a:pPr>
+            <a:r>
+              <a:rPr lang="en-US" sz="1600" b="1" dirty="0">
+                <a:solidFill>
+                  <a:srgbClr val="F4F6F9"/>
+                </a:solidFill>
+                <a:latin typeface="IBM Plex Sans" pitchFamily="34" charset="0"/>
+                <a:ea typeface="IBM Plex Sans" pitchFamily="34" charset="-122"/>
+                <a:cs typeface="IBM Plex Sans" pitchFamily="34" charset="-120"/>
+              </a:rPr>
+              <a:t>Reporte diario de ProWatch</a:t>
+            </a:r>
+            <a:endParaRPr lang="en-US" sz="1600" dirty="0"/>
+          </a:p>
+        </p:txBody>
+      </p:sp>
+      <p:sp>
+        <p:nvSpPr>
+          <p:cNvPr id="6" name="Text 4"/>
+          <p:cNvSpPr/>
+          <p:nvPr/>
+        </p:nvSpPr>
+        <p:spPr>
+          <a:xfrm>
+            <a:off x="1020233" y="2645702"/>
+            <a:ext cx="1901105" cy="878681"/>
+          </a:xfrm>
+          <a:prstGeom prst="rect">
+            <a:avLst/>
+          </a:prstGeom>
+          <a:noFill/>
+          <a:ln/>
+        </p:spPr>
+        <p:txBody>
+          <a:bodyPr wrap="square" lIns="0" tIns="0" rIns="0" bIns="0" rtlCol="0" anchor="t">
+            <a:normAutofit/>
+          </a:bodyPr>
+          <a:lstStyle/>
+          <a:p>
+            <a:pPr algn="l" indent="0" marL="0">
+              <a:lnSpc>
+                <a:spcPts val="1680"/>
+              </a:lnSpc>
+              <a:buNone/>
+            </a:pPr>
+            <a:r>
+              <a:rPr lang="en-US" sz="1200" dirty="0">
+                <a:solidFill>
+                  <a:srgbClr val="B9C6D6"/>
+                </a:solidFill>
+                <a:latin typeface="IBM Plex Sans" pitchFamily="34" charset="0"/>
+                <a:ea typeface="IBM Plex Sans" pitchFamily="34" charset="-122"/>
+                <a:cs typeface="IBM Plex Sans" pitchFamily="34" charset="-120"/>
+              </a:rPr>
+              <a:t>Excel con las marcaciones por persona, sede, panel y empresa.</a:t>
+            </a:r>
+            <a:endParaRPr lang="en-US" sz="1200" dirty="0"/>
+          </a:p>
+        </p:txBody>
+      </p:sp>
+      <p:pic>
+        <p:nvPicPr>
+          <p:cNvPr id="7" name="Image 0" descr="arrow-right">    </p:cNvPr>
+          <p:cNvPicPr>
+            <a:picLocks noChangeAspect="1"/>
+          </p:cNvPicPr>
+          <p:nvPr/>
+        </p:nvPicPr>
+        <p:blipFill>
+          <a:blip r:embed="rId1"/>
+          <a:srcRect l="0" r="0" t="0" b="0"/>
+          <a:stretch/>
+        </p:blipFill>
+        <p:spPr>
+          <a:xfrm>
+            <a:off x="3175000" y="2569437"/>
+            <a:ext cx="304800" cy="152400"/>
+          </a:xfrm>
+          <a:prstGeom prst="rect">
+            <a:avLst/>
+          </a:prstGeom>
+        </p:spPr>
+      </p:pic>
+      <p:sp>
+        <p:nvSpPr>
+          <p:cNvPr id="8" name="Shape 5"/>
+          <p:cNvSpPr/>
+          <p:nvPr/>
+        </p:nvSpPr>
+        <p:spPr>
+          <a:xfrm>
+            <a:off x="3584575" y="1588095"/>
+            <a:ext cx="2254250" cy="2115145"/>
+          </a:xfrm>
+          <a:prstGeom prst="roundRect">
+            <a:avLst>
+              <a:gd name="adj" fmla="val 4653"/>
+            </a:avLst>
+          </a:prstGeom>
+          <a:solidFill>
+            <a:srgbClr val="14263D"/>
+          </a:solidFill>
+          <a:ln w="6350">
+            <a:solidFill>
+              <a:srgbClr val="24405F"/>
+            </a:solidFill>
+            <a:prstDash val="solid"/>
+          </a:ln>
+        </p:spPr>
+      </p:sp>
+      <p:sp>
+        <p:nvSpPr>
+          <p:cNvPr id="9" name="Text 6"/>
+          <p:cNvSpPr/>
+          <p:nvPr/>
+        </p:nvSpPr>
+        <p:spPr>
+          <a:xfrm>
+            <a:off x="3788833" y="1792356"/>
+            <a:ext cx="1901105" cy="238720"/>
+          </a:xfrm>
+          <a:prstGeom prst="rect">
+            <a:avLst/>
+          </a:prstGeom>
+          <a:noFill/>
+          <a:ln/>
+        </p:spPr>
+        <p:txBody>
+          <a:bodyPr wrap="square" lIns="0" tIns="0" rIns="0" bIns="0" rtlCol="0" anchor="t">
+            <a:normAutofit/>
+          </a:bodyPr>
+          <a:lstStyle/>
+          <a:p>
+            <a:pPr algn="l" indent="0" marL="0">
+              <a:lnSpc>
+                <a:spcPts val="1680"/>
+              </a:lnSpc>
+              <a:buNone/>
+            </a:pPr>
+            <a:r>
+              <a:rPr lang="en-US" sz="1200" dirty="0">
+                <a:solidFill>
+                  <a:srgbClr val="38BDF8"/>
+                </a:solidFill>
+                <a:latin typeface="IBM Plex Mono" pitchFamily="49" charset="0"/>
+                <a:ea typeface="IBM Plex Mono" pitchFamily="49" charset="-122"/>
+                <a:cs typeface="IBM Plex Mono" pitchFamily="49" charset="-120"/>
+              </a:rPr>
+              <a:t>PASO 2</a:t>
+            </a:r>
+            <a:endParaRPr lang="en-US" sz="1200" dirty="0"/>
+          </a:p>
+        </p:txBody>
+      </p:sp>
+      <p:sp>
+        <p:nvSpPr>
+          <p:cNvPr id="10" name="Text 7"/>
+          <p:cNvSpPr/>
+          <p:nvPr/>
+        </p:nvSpPr>
+        <p:spPr>
+          <a:xfrm>
+            <a:off x="3788833" y="2081876"/>
+            <a:ext cx="1901105" cy="269214"/>
+          </a:xfrm>
+          <a:prstGeom prst="rect">
+            <a:avLst/>
+          </a:prstGeom>
+          <a:noFill/>
+          <a:ln/>
+        </p:spPr>
+        <p:txBody>
+          <a:bodyPr wrap="square" lIns="0" tIns="0" rIns="0" bIns="0" rtlCol="0" anchor="t">
+            <a:normAutofit/>
+          </a:bodyPr>
+          <a:lstStyle/>
+          <a:p>
+            <a:pPr algn="l" indent="0" marL="0">
+              <a:lnSpc>
+                <a:spcPts val="1920"/>
+              </a:lnSpc>
+              <a:buNone/>
+            </a:pPr>
+            <a:r>
+              <a:rPr lang="en-US" sz="1600" b="1" dirty="0">
+                <a:solidFill>
+                  <a:srgbClr val="F4F6F9"/>
+                </a:solidFill>
+                <a:latin typeface="IBM Plex Sans" pitchFamily="34" charset="0"/>
+                <a:ea typeface="IBM Plex Sans" pitchFamily="34" charset="-122"/>
+                <a:cs typeface="IBM Plex Sans" pitchFamily="34" charset="-120"/>
+              </a:rPr>
+              <a:t>Carga y validación</a:t>
+            </a:r>
+            <a:endParaRPr lang="en-US" sz="1600" dirty="0"/>
+          </a:p>
+        </p:txBody>
+      </p:sp>
+      <p:sp>
+        <p:nvSpPr>
+          <p:cNvPr id="11" name="Text 8"/>
+          <p:cNvSpPr/>
+          <p:nvPr/>
+        </p:nvSpPr>
+        <p:spPr>
+          <a:xfrm>
+            <a:off x="3788833" y="2401888"/>
+            <a:ext cx="1901105" cy="665361"/>
+          </a:xfrm>
+          <a:prstGeom prst="rect">
+            <a:avLst/>
+          </a:prstGeom>
+          <a:noFill/>
+          <a:ln/>
+        </p:spPr>
+        <p:txBody>
+          <a:bodyPr wrap="square" lIns="0" tIns="0" rIns="0" bIns="0" rtlCol="0" anchor="t">
+            <a:normAutofit/>
+          </a:bodyPr>
+          <a:lstStyle/>
+          <a:p>
+            <a:pPr algn="l" indent="0" marL="0">
+              <a:lnSpc>
+                <a:spcPts val="1680"/>
+              </a:lnSpc>
+              <a:buNone/>
+            </a:pPr>
+            <a:r>
+              <a:rPr lang="en-US" sz="1200" dirty="0">
+                <a:solidFill>
+                  <a:srgbClr val="B9C6D6"/>
+                </a:solidFill>
+                <a:latin typeface="IBM Plex Sans" pitchFamily="34" charset="0"/>
+                <a:ea typeface="IBM Plex Sans" pitchFamily="34" charset="-122"/>
+                <a:cs typeface="IBM Plex Sans" pitchFamily="34" charset="-120"/>
+              </a:rPr>
+              <a:t>El administrador lo sube; se omiten archivos y filas repetidas.</a:t>
+            </a:r>
+            <a:endParaRPr lang="en-US" sz="1200" dirty="0"/>
+          </a:p>
+        </p:txBody>
+      </p:sp>
+      <p:pic>
+        <p:nvPicPr>
+          <p:cNvPr id="12" name="Image 1" descr="arrow-right">    </p:cNvPr>
+          <p:cNvPicPr>
+            <a:picLocks noChangeAspect="1"/>
+          </p:cNvPicPr>
+          <p:nvPr/>
+        </p:nvPicPr>
+        <p:blipFill>
+          <a:blip r:embed="rId2"/>
+          <a:srcRect l="0" r="0" t="0" b="0"/>
+          <a:stretch/>
+        </p:blipFill>
+        <p:spPr>
+          <a:xfrm>
+            <a:off x="5943600" y="2569437"/>
+            <a:ext cx="304800" cy="152400"/>
+          </a:xfrm>
+          <a:prstGeom prst="rect">
+            <a:avLst/>
+          </a:prstGeom>
+        </p:spPr>
+      </p:pic>
+      <p:sp>
+        <p:nvSpPr>
+          <p:cNvPr id="13" name="Shape 9"/>
+          <p:cNvSpPr/>
+          <p:nvPr/>
+        </p:nvSpPr>
+        <p:spPr>
+          <a:xfrm>
+            <a:off x="6353175" y="1588095"/>
+            <a:ext cx="2254250" cy="2115145"/>
+          </a:xfrm>
+          <a:prstGeom prst="roundRect">
+            <a:avLst>
+              <a:gd name="adj" fmla="val 4653"/>
+            </a:avLst>
+          </a:prstGeom>
+          <a:solidFill>
+            <a:srgbClr val="14263D"/>
+          </a:solidFill>
+          <a:ln w="6350">
+            <a:solidFill>
+              <a:srgbClr val="24405F"/>
+            </a:solidFill>
+            <a:prstDash val="solid"/>
+          </a:ln>
+        </p:spPr>
+      </p:sp>
+      <p:sp>
+        <p:nvSpPr>
+          <p:cNvPr id="14" name="Text 10"/>
+          <p:cNvSpPr/>
+          <p:nvPr/>
+        </p:nvSpPr>
+        <p:spPr>
+          <a:xfrm>
+            <a:off x="6557434" y="1792356"/>
+            <a:ext cx="1901105" cy="238720"/>
+          </a:xfrm>
+          <a:prstGeom prst="rect">
+            <a:avLst/>
+          </a:prstGeom>
+          <a:noFill/>
+          <a:ln/>
+        </p:spPr>
+        <p:txBody>
+          <a:bodyPr wrap="square" lIns="0" tIns="0" rIns="0" bIns="0" rtlCol="0" anchor="t">
+            <a:normAutofit/>
+          </a:bodyPr>
+          <a:lstStyle/>
+          <a:p>
+            <a:pPr algn="l" indent="0" marL="0">
+              <a:lnSpc>
+                <a:spcPts val="1680"/>
+              </a:lnSpc>
+              <a:buNone/>
+            </a:pPr>
+            <a:r>
+              <a:rPr lang="en-US" sz="1200" dirty="0">
+                <a:solidFill>
+                  <a:srgbClr val="38BDF8"/>
+                </a:solidFill>
+                <a:latin typeface="IBM Plex Mono" pitchFamily="49" charset="0"/>
+                <a:ea typeface="IBM Plex Mono" pitchFamily="49" charset="-122"/>
+                <a:cs typeface="IBM Plex Mono" pitchFamily="49" charset="-120"/>
+              </a:rPr>
+              <a:t>PASO 3</a:t>
+            </a:r>
+            <a:endParaRPr lang="en-US" sz="1200" dirty="0"/>
+          </a:p>
+        </p:txBody>
+      </p:sp>
+      <p:sp>
+        <p:nvSpPr>
+          <p:cNvPr id="15" name="Text 11"/>
+          <p:cNvSpPr/>
+          <p:nvPr/>
+        </p:nvSpPr>
+        <p:spPr>
+          <a:xfrm>
+            <a:off x="6557434" y="2081876"/>
+            <a:ext cx="1901105" cy="513027"/>
+          </a:xfrm>
+          <a:prstGeom prst="rect">
+            <a:avLst/>
+          </a:prstGeom>
+          <a:noFill/>
+          <a:ln/>
+        </p:spPr>
+        <p:txBody>
+          <a:bodyPr wrap="square" lIns="0" tIns="0" rIns="0" bIns="0" rtlCol="0" anchor="t">
+            <a:normAutofit/>
+          </a:bodyPr>
+          <a:lstStyle/>
+          <a:p>
+            <a:pPr algn="l" indent="0" marL="0">
+              <a:lnSpc>
+                <a:spcPts val="1920"/>
+              </a:lnSpc>
+              <a:buNone/>
+            </a:pPr>
+            <a:r>
+              <a:rPr lang="en-US" sz="1600" b="1" dirty="0">
+                <a:solidFill>
+                  <a:srgbClr val="F4F6F9"/>
+                </a:solidFill>
+                <a:latin typeface="IBM Plex Sans" pitchFamily="34" charset="0"/>
+                <a:ea typeface="IBM Plex Sans" pitchFamily="34" charset="-122"/>
+                <a:cs typeface="IBM Plex Sans" pitchFamily="34" charset="-120"/>
+              </a:rPr>
+              <a:t>Base histórica</a:t>
+            </a:r>
+            <a:endParaRPr lang="en-US" sz="1600" dirty="0"/>
+          </a:p>
+        </p:txBody>
+      </p:sp>
+      <p:sp>
+        <p:nvSpPr>
+          <p:cNvPr id="16" name="Text 12"/>
+          <p:cNvSpPr/>
+          <p:nvPr/>
+        </p:nvSpPr>
+        <p:spPr>
+          <a:xfrm>
+            <a:off x="6557434" y="2645702"/>
+            <a:ext cx="1901105" cy="665361"/>
+          </a:xfrm>
+          <a:prstGeom prst="rect">
+            <a:avLst/>
+          </a:prstGeom>
+          <a:noFill/>
+          <a:ln/>
+        </p:spPr>
+        <p:txBody>
+          <a:bodyPr wrap="square" lIns="0" tIns="0" rIns="0" bIns="0" rtlCol="0" anchor="t">
+            <a:normAutofit/>
+          </a:bodyPr>
+          <a:lstStyle/>
+          <a:p>
+            <a:pPr algn="l" indent="0" marL="0">
+              <a:lnSpc>
+                <a:spcPts val="1680"/>
+              </a:lnSpc>
+              <a:buNone/>
+            </a:pPr>
+            <a:r>
+              <a:rPr lang="en-US" sz="1200" dirty="0">
+                <a:solidFill>
+                  <a:srgbClr val="B9C6D6"/>
+                </a:solidFill>
+                <a:latin typeface="IBM Plex Sans" pitchFamily="34" charset="0"/>
+                <a:ea typeface="IBM Plex Sans" pitchFamily="34" charset="-122"/>
+                <a:cs typeface="IBM Plex Sans" pitchFamily="34" charset="-120"/>
+              </a:rPr>
+              <a:t>1,85 millones de marcaciones desde enero de 2026.</a:t>
+            </a:r>
+            <a:endParaRPr lang="en-US" sz="1200" dirty="0"/>
+          </a:p>
+        </p:txBody>
+      </p:sp>
+      <p:pic>
+        <p:nvPicPr>
+          <p:cNvPr id="17" name="Image 2" descr="arrow-right">    </p:cNvPr>
+          <p:cNvPicPr>
+            <a:picLocks noChangeAspect="1"/>
+          </p:cNvPicPr>
+          <p:nvPr/>
+        </p:nvPicPr>
+        <p:blipFill>
+          <a:blip r:embed="rId3"/>
+          <a:srcRect l="0" r="0" t="0" b="0"/>
+          <a:stretch/>
+        </p:blipFill>
+        <p:spPr>
+          <a:xfrm>
+            <a:off x="8712200" y="2569437"/>
+            <a:ext cx="304800" cy="152400"/>
+          </a:xfrm>
+          <a:prstGeom prst="rect">
+            <a:avLst/>
+          </a:prstGeom>
+        </p:spPr>
+      </p:pic>
+      <p:sp>
+        <p:nvSpPr>
+          <p:cNvPr id="18" name="Shape 13"/>
+          <p:cNvSpPr/>
+          <p:nvPr/>
+        </p:nvSpPr>
+        <p:spPr>
+          <a:xfrm>
+            <a:off x="9121775" y="1588095"/>
+            <a:ext cx="2254250" cy="2115145"/>
+          </a:xfrm>
+          <a:prstGeom prst="roundRect">
+            <a:avLst>
+              <a:gd name="adj" fmla="val 4653"/>
+            </a:avLst>
+          </a:prstGeom>
+          <a:solidFill>
+            <a:srgbClr val="14263D"/>
+          </a:solidFill>
+          <a:ln w="6350">
+            <a:solidFill>
+              <a:srgbClr val="38BDF8"/>
+            </a:solidFill>
+            <a:prstDash val="solid"/>
+          </a:ln>
+        </p:spPr>
+      </p:sp>
+      <p:sp>
+        <p:nvSpPr>
+          <p:cNvPr id="19" name="Text 14"/>
+          <p:cNvSpPr/>
+          <p:nvPr/>
+        </p:nvSpPr>
+        <p:spPr>
+          <a:xfrm>
+            <a:off x="9326034" y="1792356"/>
+            <a:ext cx="1901105" cy="238720"/>
+          </a:xfrm>
+          <a:prstGeom prst="rect">
+            <a:avLst/>
+          </a:prstGeom>
+          <a:noFill/>
+          <a:ln/>
+        </p:spPr>
+        <p:txBody>
+          <a:bodyPr wrap="square" lIns="0" tIns="0" rIns="0" bIns="0" rtlCol="0" anchor="t">
+            <a:normAutofit/>
+          </a:bodyPr>
+          <a:lstStyle/>
+          <a:p>
+            <a:pPr algn="l" indent="0" marL="0">
+              <a:lnSpc>
+                <a:spcPts val="1680"/>
+              </a:lnSpc>
+              <a:buNone/>
+            </a:pPr>
+            <a:r>
+              <a:rPr lang="en-US" sz="1200" dirty="0">
+                <a:solidFill>
+                  <a:srgbClr val="38BDF8"/>
+                </a:solidFill>
+                <a:latin typeface="IBM Plex Mono" pitchFamily="49" charset="0"/>
+                <a:ea typeface="IBM Plex Mono" pitchFamily="49" charset="-122"/>
+                <a:cs typeface="IBM Plex Mono" pitchFamily="49" charset="-120"/>
+              </a:rPr>
+              <a:t>RESULTADO</a:t>
+            </a:r>
+            <a:endParaRPr lang="en-US" sz="1200" dirty="0"/>
+          </a:p>
+        </p:txBody>
+      </p:sp>
+      <p:sp>
+        <p:nvSpPr>
+          <p:cNvPr id="20" name="Text 15"/>
+          <p:cNvSpPr/>
+          <p:nvPr/>
+        </p:nvSpPr>
+        <p:spPr>
+          <a:xfrm>
+            <a:off x="9326034" y="2081876"/>
+            <a:ext cx="1901105" cy="513027"/>
+          </a:xfrm>
+          <a:prstGeom prst="rect">
+            <a:avLst/>
+          </a:prstGeom>
+          <a:noFill/>
+          <a:ln/>
+        </p:spPr>
+        <p:txBody>
+          <a:bodyPr wrap="square" lIns="0" tIns="0" rIns="0" bIns="0" rtlCol="0" anchor="t">
+            <a:normAutofit/>
+          </a:bodyPr>
+          <a:lstStyle/>
+          <a:p>
+            <a:pPr algn="l" indent="0" marL="0">
+              <a:lnSpc>
+                <a:spcPts val="1920"/>
+              </a:lnSpc>
+              <a:buNone/>
+            </a:pPr>
+            <a:r>
+              <a:rPr lang="en-US" sz="1600" b="1" dirty="0">
+                <a:solidFill>
+                  <a:srgbClr val="F4F6F9"/>
+                </a:solidFill>
+                <a:latin typeface="IBM Plex Sans" pitchFamily="34" charset="0"/>
+                <a:ea typeface="IBM Plex Sans" pitchFamily="34" charset="-122"/>
+                <a:cs typeface="IBM Plex Sans" pitchFamily="34" charset="-120"/>
+              </a:rPr>
+              <a:t>Consulta y exportación</a:t>
+            </a:r>
+            <a:endParaRPr lang="en-US" sz="1600" dirty="0"/>
+          </a:p>
+        </p:txBody>
+      </p:sp>
+      <p:sp>
+        <p:nvSpPr>
+          <p:cNvPr id="21" name="Text 16"/>
+          <p:cNvSpPr/>
+          <p:nvPr/>
+        </p:nvSpPr>
+        <p:spPr>
+          <a:xfrm>
+            <a:off x="9326034" y="2645702"/>
+            <a:ext cx="1901105" cy="878681"/>
+          </a:xfrm>
+          <a:prstGeom prst="rect">
+            <a:avLst/>
+          </a:prstGeom>
+          <a:noFill/>
+          <a:ln/>
+        </p:spPr>
+        <p:txBody>
+          <a:bodyPr wrap="square" lIns="0" tIns="0" rIns="0" bIns="0" rtlCol="0" anchor="t">
+            <a:normAutofit/>
+          </a:bodyPr>
+          <a:lstStyle/>
+          <a:p>
+            <a:pPr algn="l" indent="0" marL="0">
+              <a:lnSpc>
+                <a:spcPts val="1680"/>
+              </a:lnSpc>
+              <a:buNone/>
+            </a:pPr>
+            <a:r>
+              <a:rPr lang="en-US" sz="1200" dirty="0">
+                <a:solidFill>
+                  <a:srgbClr val="B9C6D6"/>
+                </a:solidFill>
+                <a:latin typeface="IBM Plex Sans" pitchFamily="34" charset="0"/>
+                <a:ea typeface="IBM Plex Sans" pitchFamily="34" charset="-122"/>
+                <a:cs typeface="IBM Plex Sans" pitchFamily="34" charset="-120"/>
+              </a:rPr>
+              <a:t>Dashboard, búsqueda por cédula o nombre y descarga a Excel o CSV.</a:t>
+            </a:r>
+            <a:endParaRPr lang="en-US" sz="1200" dirty="0"/>
+          </a:p>
+        </p:txBody>
+      </p:sp>
+      <p:pic>
+        <p:nvPicPr>
+          <p:cNvPr id="22" name="Image 3" descr="Lightning">    </p:cNvPr>
+          <p:cNvPicPr>
+            <a:picLocks noChangeAspect="1"/>
+          </p:cNvPicPr>
+          <p:nvPr/>
+        </p:nvPicPr>
+        <p:blipFill>
+          <a:blip r:embed="rId4"/>
+          <a:srcRect l="-333" r="-333" t="0" b="0"/>
+          <a:stretch/>
+        </p:blipFill>
+        <p:spPr>
+          <a:xfrm>
+            <a:off x="812800" y="4133124"/>
+            <a:ext cx="230121" cy="254000"/>
+          </a:xfrm>
+          <a:prstGeom prst="rect">
+            <a:avLst/>
+          </a:prstGeom>
+        </p:spPr>
+      </p:pic>
+      <p:sp>
+        <p:nvSpPr>
+          <p:cNvPr id="23" name="Text 17"/>
+          <p:cNvSpPr/>
+          <p:nvPr/>
+        </p:nvSpPr>
+        <p:spPr>
+          <a:xfrm>
+            <a:off x="1144521" y="4011216"/>
+            <a:ext cx="3076828" cy="523214"/>
+          </a:xfrm>
+          <a:prstGeom prst="rect">
+            <a:avLst/>
+          </a:prstGeom>
+          <a:noFill/>
+          <a:ln/>
+        </p:spPr>
+        <p:txBody>
+          <a:bodyPr wrap="square" lIns="0" tIns="0" rIns="0" bIns="0" rtlCol="0" anchor="t">
+            <a:normAutofit/>
+          </a:bodyPr>
+          <a:lstStyle/>
+          <a:p>
+            <a:pPr algn="l" indent="0" marL="0">
+              <a:lnSpc>
+                <a:spcPts val="1960"/>
+              </a:lnSpc>
+              <a:buNone/>
+            </a:pPr>
+            <a:r>
+              <a:rPr lang="en-US" sz="1400" dirty="0">
+                <a:solidFill>
+                  <a:srgbClr val="F4F6F9"/>
+                </a:solidFill>
+                <a:latin typeface="IBM Plex Sans" pitchFamily="34" charset="0"/>
+                <a:ea typeface="IBM Plex Sans" pitchFamily="34" charset="-122"/>
+                <a:cs typeface="IBM Plex Sans" pitchFamily="34" charset="-120"/>
+              </a:rPr>
+              <a:t>Ya no es una app aparte sin login</a:t>
+            </a:r>
+            <a:endParaRPr lang="en-US" sz="1400" dirty="0"/>
+          </a:p>
+        </p:txBody>
+      </p:sp>
+      <p:pic>
+        <p:nvPicPr>
+          <p:cNvPr id="24" name="Image 4" descr="Lock">    </p:cNvPr>
+          <p:cNvPicPr>
+            <a:picLocks noChangeAspect="1"/>
+          </p:cNvPicPr>
+          <p:nvPr/>
+        </p:nvPicPr>
+        <p:blipFill>
+          <a:blip r:embed="rId5"/>
+          <a:srcRect l="0" r="0" t="-13" b="-13"/>
+          <a:stretch/>
+        </p:blipFill>
+        <p:spPr>
+          <a:xfrm>
+            <a:off x="4436533" y="4133124"/>
+            <a:ext cx="253934" cy="254000"/>
+          </a:xfrm>
+          <a:prstGeom prst="rect">
+            <a:avLst/>
+          </a:prstGeom>
+        </p:spPr>
+      </p:pic>
+      <p:sp>
+        <p:nvSpPr>
+          <p:cNvPr id="25" name="Text 18"/>
+          <p:cNvSpPr/>
+          <p:nvPr/>
+        </p:nvSpPr>
+        <p:spPr>
+          <a:xfrm>
+            <a:off x="4792067" y="4011216"/>
+            <a:ext cx="3052302" cy="523214"/>
+          </a:xfrm>
+          <a:prstGeom prst="rect">
+            <a:avLst/>
+          </a:prstGeom>
+          <a:noFill/>
+          <a:ln/>
+        </p:spPr>
+        <p:txBody>
+          <a:bodyPr wrap="square" lIns="0" tIns="0" rIns="0" bIns="0" rtlCol="0" anchor="t">
+            <a:normAutofit/>
+          </a:bodyPr>
+          <a:lstStyle/>
+          <a:p>
+            <a:pPr algn="l" indent="0" marL="0">
+              <a:lnSpc>
+                <a:spcPts val="1960"/>
+              </a:lnSpc>
+              <a:buNone/>
+            </a:pPr>
+            <a:r>
+              <a:rPr lang="en-US" sz="1400" dirty="0">
+                <a:solidFill>
+                  <a:srgbClr val="F4F6F9"/>
+                </a:solidFill>
+                <a:latin typeface="IBM Plex Sans" pitchFamily="34" charset="0"/>
+                <a:ea typeface="IBM Plex Sans" pitchFamily="34" charset="-122"/>
+                <a:cs typeface="IBM Plex Sans" pitchFamily="34" charset="-120"/>
+              </a:rPr>
+              <a:t>Dashboard: de 21 s a menos de 1 s</a:t>
+            </a:r>
+            <a:endParaRPr lang="en-US" sz="1400" dirty="0"/>
+          </a:p>
+        </p:txBody>
+      </p:sp>
+      <p:pic>
+        <p:nvPicPr>
+          <p:cNvPr id="26" name="Image 5" descr="Search">    </p:cNvPr>
+          <p:cNvPicPr>
+            <a:picLocks noChangeAspect="1"/>
+          </p:cNvPicPr>
+          <p:nvPr/>
+        </p:nvPicPr>
+        <p:blipFill>
+          <a:blip r:embed="rId6"/>
+          <a:srcRect l="0" r="0" t="0" b="0"/>
+          <a:stretch/>
+        </p:blipFill>
+        <p:spPr>
+          <a:xfrm>
+            <a:off x="8060267" y="4133124"/>
+            <a:ext cx="254000" cy="254000"/>
+          </a:xfrm>
+          <a:prstGeom prst="rect">
+            <a:avLst/>
+          </a:prstGeom>
+        </p:spPr>
+      </p:pic>
+      <p:sp>
+        <p:nvSpPr>
+          <p:cNvPr id="27" name="Text 19"/>
+          <p:cNvSpPr/>
+          <p:nvPr/>
+        </p:nvSpPr>
+        <p:spPr>
+          <a:xfrm>
+            <a:off x="8415867" y="4135636"/>
+            <a:ext cx="2421652" cy="274307"/>
+          </a:xfrm>
+          <a:prstGeom prst="rect">
+            <a:avLst/>
+          </a:prstGeom>
+          <a:noFill/>
+          <a:ln/>
+        </p:spPr>
+        <p:txBody>
+          <a:bodyPr wrap="square" lIns="0" tIns="0" rIns="0" bIns="0" rtlCol="0" anchor="t">
+            <a:normAutofit/>
+          </a:bodyPr>
+          <a:lstStyle/>
+          <a:p>
+            <a:pPr algn="l" indent="0" marL="0">
+              <a:lnSpc>
+                <a:spcPts val="1960"/>
+              </a:lnSpc>
+              <a:buNone/>
+            </a:pPr>
+            <a:r>
+              <a:rPr lang="en-US" sz="1400" dirty="0">
+                <a:solidFill>
+                  <a:srgbClr val="F4F6F9"/>
+                </a:solidFill>
+                <a:latin typeface="IBM Plex Sans" pitchFamily="34" charset="0"/>
+                <a:ea typeface="IBM Plex Sans" pitchFamily="34" charset="-122"/>
+                <a:cs typeface="IBM Plex Sans" pitchFamily="34" charset="-120"/>
+              </a:rPr>
+              <a:t>Consultas en la bitácora</a:t>
+            </a:r>
+            <a:endParaRPr lang="en-US" sz="1400" dirty="0"/>
+          </a:p>
+        </p:txBody>
+      </p:sp>
+      <p:sp>
+        <p:nvSpPr>
+          <p:cNvPr id="28" name="Text 20"/>
+          <p:cNvSpPr/>
+          <p:nvPr/>
+        </p:nvSpPr>
+        <p:spPr>
+          <a:xfrm>
+            <a:off x="812800" y="6238280"/>
+            <a:ext cx="3958273" cy="238720"/>
+          </a:xfrm>
+          <a:prstGeom prst="rect">
+            <a:avLst/>
+          </a:prstGeom>
+          <a:noFill/>
+          <a:ln/>
+        </p:spPr>
+        <p:txBody>
+          <a:bodyPr wrap="square" lIns="0" tIns="0" rIns="0" bIns="0" rtlCol="0" anchor="t">
+            <a:normAutofit/>
+          </a:bodyPr>
+          <a:lstStyle/>
+          <a:p>
+            <a:pPr algn="l" indent="0" marL="0">
+              <a:lnSpc>
+                <a:spcPts val="1680"/>
+              </a:lnSpc>
+              <a:buNone/>
+            </a:pPr>
+            <a:r>
+              <a:rPr lang="en-US" sz="1200" dirty="0">
+                <a:solidFill>
+                  <a:srgbClr val="8FA3BA"/>
+                </a:solidFill>
+                <a:latin typeface="IBM Plex Sans" pitchFamily="34" charset="0"/>
+                <a:ea typeface="IBM Plex Sans" pitchFamily="34" charset="-122"/>
+                <a:cs typeface="IBM Plex Sans" pitchFamily="34" charset="-120"/>
+              </a:rPr>
+              <a:t>PW Extended App · Iniciativa en desarrollo</a:t>
+            </a:r>
+            <a:endParaRPr lang="en-US" sz="1200" dirty="0"/>
+          </a:p>
+        </p:txBody>
+      </p:sp>
+      <p:sp>
+        <p:nvSpPr>
+          <p:cNvPr id="29" name="Text 21"/>
+          <p:cNvSpPr/>
+          <p:nvPr/>
+        </p:nvSpPr>
+        <p:spPr>
+          <a:xfrm>
+            <a:off x="11145507" y="6238280"/>
+            <a:ext cx="233693" cy="238720"/>
+          </a:xfrm>
+          <a:prstGeom prst="rect">
+            <a:avLst/>
+          </a:prstGeom>
+          <a:noFill/>
+          <a:ln/>
+        </p:spPr>
+        <p:txBody>
+          <a:bodyPr wrap="square" lIns="0" tIns="0" rIns="0" bIns="0" rtlCol="0" anchor="t">
+            <a:normAutofit/>
+          </a:bodyPr>
+          <a:lstStyle/>
+          <a:p>
+            <a:pPr algn="r" indent="0" marL="0">
+              <a:lnSpc>
+                <a:spcPts val="1680"/>
+              </a:lnSpc>
+              <a:buNone/>
+            </a:pPr>
+            <a:r>
+              <a:rPr lang="en-US" sz="1200" dirty="0">
+                <a:solidFill>
+                  <a:srgbClr val="8FA3BA"/>
+                </a:solidFill>
+                <a:latin typeface="IBM Plex Sans" pitchFamily="34" charset="0"/>
+                <a:ea typeface="IBM Plex Sans" pitchFamily="34" charset="-122"/>
+                <a:cs typeface="IBM Plex Sans" pitchFamily="34" charset="-120"/>
+              </a:rPr>
+              <a:t>13</a:t>
+            </a:r>
+            <a:endParaRPr lang="en-US" sz="1200" dirty="0"/>
+          </a:p>
+        </p:txBody>
+      </p:sp>
+    </p:spTree>
+  </p:cSld>
+  <p:clrMapOvr>
+    <a:masterClrMapping/>
+  </p:clrMapOvr>
+</p:sld>
+</file>
+
 <file path=ppt/slides/slide2.xml><?xml version="1.0" encoding="utf-8"?>
 <p:sld xmlns:a="http://schemas.openxmlformats.org/drawingml/2006/main" xmlns:r="http://schemas.openxmlformats.org/officeDocument/2006/relationships" xmlns:p="http://schemas.openxmlformats.org/presentationml/2006/main">
   <p:cSld name="Slide 2">
@@ -14240,7 +15876,7 @@
                 <a:ea typeface="IBM Plex Sans" pitchFamily="34" charset="-122"/>
                 <a:cs typeface="IBM Plex Sans" pitchFamily="34" charset="-120"/>
               </a:rPr>
-              <a:t>Usuarios Retirados DTU · Iniciativa en desarrollo</a:t>
+              <a:t>PW Extended App · Iniciativa en desarrollo</a:t>
             </a:r>
             <a:endParaRPr lang="en-US" sz="1200" dirty="0"/>
           </a:p>
@@ -14285,6 +15921,3263 @@
                 <a:cs typeface="IBM Plex Sans" pitchFamily="34" charset="-120"/>
               </a:rPr>
               <a:t>02</a:t>
+            </a:r>
+            <a:endParaRPr lang="en-US" sz="1200" dirty="0"/>
+          </a:p>
+        </p:txBody>
+      </p:sp>
+    </p:spTree>
+  </p:cSld>
+  <p:clrMapOvr>
+    <a:masterClrMapping/>
+  </p:clrMapOvr>
+</p:sld>
+</file>
+
+<file path=ppt/slides/slide20.xml><?xml version="1.0" encoding="utf-8"?>
+<p:sld xmlns:a="http://schemas.openxmlformats.org/drawingml/2006/main" xmlns:r="http://schemas.openxmlformats.org/officeDocument/2006/relationships" xmlns:p="http://schemas.openxmlformats.org/presentationml/2006/main">
+  <p:cSld name="Slide 16">
+    <p:bg>
+      <p:bgPr>
+        <a:solidFill>
+          <a:srgbClr val="F4F6F9"/>
+        </a:solidFill>
+      </p:bgPr>
+    </p:bg>
+    <p:spTree>
+      <p:nvGrpSpPr>
+        <p:cNvPr id="1" name=""/>
+        <p:cNvGrpSpPr/>
+        <p:nvPr/>
+      </p:nvGrpSpPr>
+      <p:grpSpPr>
+        <a:xfrm>
+          <a:off x="0" y="0"/>
+          <a:ext cx="0" cy="0"/>
+          <a:chOff x="0" y="0"/>
+          <a:chExt cx="0" cy="0"/>
+        </a:xfrm>
+      </p:grpSpPr>
+      <p:sp>
+        <p:nvSpPr>
+          <p:cNvPr id="2" name="Text 0"/>
+          <p:cNvSpPr/>
+          <p:nvPr>
+            <p:ph type="title"/>
+          </p:nvPr>
+        </p:nvSpPr>
+        <p:spPr>
+          <a:xfrm>
+            <a:off x="812800" y="812800"/>
+            <a:ext cx="10883392" cy="492720"/>
+          </a:xfrm>
+          <a:prstGeom prst="rect">
+            <a:avLst/>
+          </a:prstGeom>
+          <a:noFill/>
+          <a:ln/>
+        </p:spPr>
+        <p:txBody>
+          <a:bodyPr wrap="square" lIns="0" tIns="0" rIns="0" bIns="0" rtlCol="0" anchor="t">
+            <a:normAutofit/>
+          </a:bodyPr>
+          <a:lstStyle/>
+          <a:p>
+            <a:pPr algn="l" indent="0" marL="0">
+              <a:lnSpc>
+                <a:spcPts val="3680"/>
+              </a:lnSpc>
+              <a:buNone/>
+            </a:pPr>
+            <a:r>
+              <a:rPr lang="en-US" sz="3200" b="1" i="0" dirty="0">
+                <a:solidFill>
+                  <a:srgbClr val="0E1A2B"/>
+                </a:solidFill>
+                <a:latin typeface="IBM Plex Sans" pitchFamily="34" charset="0"/>
+                <a:ea typeface="IBM Plex Sans" pitchFamily="34" charset="-122"/>
+                <a:cs typeface="IBM Plex Sans" pitchFamily="34" charset="-120"/>
+              </a:rPr>
+              <a:t>Más seguridad, velocidad y control</a:t>
+            </a:r>
+            <a:endParaRPr lang="en-US" sz="3200" dirty="0"/>
+          </a:p>
+        </p:txBody>
+      </p:sp>
+      <p:sp>
+        <p:nvSpPr>
+          <p:cNvPr id="3" name="Shape 1"/>
+          <p:cNvSpPr/>
+          <p:nvPr/>
+        </p:nvSpPr>
+        <p:spPr>
+          <a:xfrm>
+            <a:off x="815975" y="1537295"/>
+            <a:ext cx="3380317" cy="2346523"/>
+          </a:xfrm>
+          <a:prstGeom prst="roundRect">
+            <a:avLst>
+              <a:gd name="adj" fmla="val 4195"/>
+            </a:avLst>
+          </a:prstGeom>
+          <a:solidFill>
+            <a:srgbClr val="FCFDFE"/>
+          </a:solidFill>
+          <a:ln w="6350">
+            <a:solidFill>
+              <a:srgbClr val="DDE3EA"/>
+            </a:solidFill>
+            <a:prstDash val="solid"/>
+          </a:ln>
+        </p:spPr>
+      </p:sp>
+      <p:pic>
+        <p:nvPicPr>
+          <p:cNvPr id="4" name="Image 0" descr="CheckCircle">    </p:cNvPr>
+          <p:cNvPicPr>
+            <a:picLocks noChangeAspect="1"/>
+          </p:cNvPicPr>
+          <p:nvPr/>
+        </p:nvPicPr>
+        <p:blipFill>
+          <a:blip r:embed="rId1"/>
+          <a:srcRect l="0" r="0" t="0" b="0"/>
+          <a:stretch/>
+        </p:blipFill>
+        <p:spPr>
+          <a:xfrm>
+            <a:off x="1045633" y="1802482"/>
+            <a:ext cx="203200" cy="203200"/>
+          </a:xfrm>
+          <a:prstGeom prst="rect">
+            <a:avLst/>
+          </a:prstGeom>
+        </p:spPr>
+      </p:pic>
+      <p:sp>
+        <p:nvSpPr>
+          <p:cNvPr id="5" name="Text 2"/>
+          <p:cNvSpPr/>
+          <p:nvPr/>
+        </p:nvSpPr>
+        <p:spPr>
+          <a:xfrm>
+            <a:off x="1325033" y="1766962"/>
+            <a:ext cx="1399778" cy="299707"/>
+          </a:xfrm>
+          <a:prstGeom prst="rect">
+            <a:avLst/>
+          </a:prstGeom>
+          <a:noFill/>
+          <a:ln/>
+        </p:spPr>
+        <p:txBody>
+          <a:bodyPr wrap="square" lIns="0" tIns="0" rIns="0" bIns="0" rtlCol="0" anchor="t">
+            <a:normAutofit/>
+          </a:bodyPr>
+          <a:lstStyle/>
+          <a:p>
+            <a:pPr algn="l" indent="0" marL="0">
+              <a:lnSpc>
+                <a:spcPts val="2160"/>
+              </a:lnSpc>
+              <a:buNone/>
+            </a:pPr>
+            <a:r>
+              <a:rPr lang="en-US" sz="1800" b="1" dirty="0">
+                <a:solidFill>
+                  <a:srgbClr val="0369A1"/>
+                </a:solidFill>
+                <a:latin typeface="IBM Plex Sans" pitchFamily="34" charset="0"/>
+                <a:ea typeface="IBM Plex Sans" pitchFamily="34" charset="-122"/>
+                <a:cs typeface="IBM Plex Sans" pitchFamily="34" charset="-120"/>
+              </a:rPr>
+              <a:t>Seguridad</a:t>
+            </a:r>
+            <a:endParaRPr lang="en-US" sz="1800" dirty="0"/>
+          </a:p>
+        </p:txBody>
+      </p:sp>
+      <p:sp>
+        <p:nvSpPr>
+          <p:cNvPr id="6" name="Text 3"/>
+          <p:cNvSpPr/>
+          <p:nvPr/>
+        </p:nvSpPr>
+        <p:spPr>
+          <a:xfrm>
+            <a:off x="1130977" y="2168265"/>
+            <a:ext cx="2915666" cy="1016000"/>
+          </a:xfrm>
+          <a:prstGeom prst="rect">
+            <a:avLst/>
+          </a:prstGeom>
+          <a:noFill/>
+          <a:ln/>
+        </p:spPr>
+        <p:txBody>
+          <a:bodyPr wrap="square" lIns="0" tIns="0" rIns="0" bIns="0" rtlCol="0" anchor="t">
+            <a:normAutofit/>
+          </a:bodyPr>
+          <a:lstStyle/>
+          <a:p>
+            <a:pPr algn="l" marL="168656" indent="-168656">
+              <a:lnSpc>
+                <a:spcPts val="1950"/>
+              </a:lnSpc>
+              <a:buSzPct val="100000"/>
+              <a:buChar char="•"/>
+            </a:pPr>
+            <a:r>
+              <a:rPr lang="en-US" sz="1300" dirty="0">
+                <a:solidFill>
+                  <a:srgbClr val="3E4C5E"/>
+                </a:solidFill>
+                <a:latin typeface="IBM Plex Sans" pitchFamily="34" charset="0"/>
+                <a:ea typeface="IBM Plex Sans" pitchFamily="34" charset="-122"/>
+                <a:cs typeface="IBM Plex Sans" pitchFamily="34" charset="-120"/>
+              </a:rPr>
+              <a:t>Cambio de contraseña obligatorio</a:t>
+            </a:r>
+            <a:endParaRPr lang="en-US" sz="1300" dirty="0"/>
+          </a:p>
+          <a:p>
+            <a:pPr algn="l" marL="168656" indent="-168656">
+              <a:lnSpc>
+                <a:spcPts val="1950"/>
+              </a:lnSpc>
+              <a:buSzPct val="100000"/>
+              <a:buChar char="•"/>
+            </a:pPr>
+            <a:r>
+              <a:rPr lang="en-US" sz="1300" dirty="0">
+                <a:solidFill>
+                  <a:srgbClr val="3E4C5E"/>
+                </a:solidFill>
+                <a:latin typeface="IBM Plex Sans" pitchFamily="34" charset="0"/>
+                <a:ea typeface="IBM Plex Sans" pitchFamily="34" charset="-122"/>
+                <a:cs typeface="IBM Plex Sans" pitchFamily="34" charset="-120"/>
+              </a:rPr>
+              <a:t>Bloqueo tras 5 intentos fallidos</a:t>
+            </a:r>
+            <a:endParaRPr lang="en-US" sz="1300" dirty="0"/>
+          </a:p>
+          <a:p>
+            <a:pPr algn="l" marL="168656" indent="-168656">
+              <a:lnSpc>
+                <a:spcPts val="1950"/>
+              </a:lnSpc>
+              <a:buSzPct val="100000"/>
+              <a:buChar char="•"/>
+            </a:pPr>
+            <a:r>
+              <a:rPr lang="en-US" sz="1300" dirty="0">
+                <a:solidFill>
+                  <a:srgbClr val="3E4C5E"/>
+                </a:solidFill>
+                <a:latin typeface="IBM Plex Sans" pitchFamily="34" charset="0"/>
+                <a:ea typeface="IBM Plex Sans" pitchFamily="34" charset="-122"/>
+                <a:cs typeface="IBM Plex Sans" pitchFamily="34" charset="-120"/>
+              </a:rPr>
+              <a:t>Conexión cifrada con TLS 1.3</a:t>
+            </a:r>
+            <a:endParaRPr lang="en-US" sz="1300" dirty="0"/>
+          </a:p>
+          <a:p>
+            <a:pPr algn="l" marL="168656" indent="-168656">
+              <a:lnSpc>
+                <a:spcPts val="1950"/>
+              </a:lnSpc>
+              <a:buSzPct val="100000"/>
+              <a:buChar char="•"/>
+            </a:pPr>
+            <a:r>
+              <a:rPr lang="en-US" sz="1300" dirty="0">
+                <a:solidFill>
+                  <a:srgbClr val="3E4C5E"/>
+                </a:solidFill>
+                <a:latin typeface="IBM Plex Sans" pitchFamily="34" charset="0"/>
+                <a:ea typeface="IBM Plex Sans" pitchFamily="34" charset="-122"/>
+                <a:cs typeface="IBM Plex Sans" pitchFamily="34" charset="-120"/>
+              </a:rPr>
+              <a:t>Bitácora de auditoría</a:t>
+            </a:r>
+            <a:endParaRPr lang="en-US" sz="1300" dirty="0"/>
+          </a:p>
+        </p:txBody>
+      </p:sp>
+      <p:sp>
+        <p:nvSpPr>
+          <p:cNvPr id="7" name="Shape 4"/>
+          <p:cNvSpPr/>
+          <p:nvPr/>
+        </p:nvSpPr>
+        <p:spPr>
+          <a:xfrm>
+            <a:off x="4405842" y="1537295"/>
+            <a:ext cx="3380317" cy="2346523"/>
+          </a:xfrm>
+          <a:prstGeom prst="roundRect">
+            <a:avLst>
+              <a:gd name="adj" fmla="val 4195"/>
+            </a:avLst>
+          </a:prstGeom>
+          <a:solidFill>
+            <a:srgbClr val="FCFDFE"/>
+          </a:solidFill>
+          <a:ln w="6350">
+            <a:solidFill>
+              <a:srgbClr val="DDE3EA"/>
+            </a:solidFill>
+            <a:prstDash val="solid"/>
+          </a:ln>
+        </p:spPr>
+      </p:sp>
+      <p:pic>
+        <p:nvPicPr>
+          <p:cNvPr id="8" name="Image 1" descr="Wrench">    </p:cNvPr>
+          <p:cNvPicPr>
+            <a:picLocks noChangeAspect="1"/>
+          </p:cNvPicPr>
+          <p:nvPr/>
+        </p:nvPicPr>
+        <p:blipFill>
+          <a:blip r:embed="rId2"/>
+          <a:srcRect l="0" r="0" t="0" b="0"/>
+          <a:stretch/>
+        </p:blipFill>
+        <p:spPr>
+          <a:xfrm>
+            <a:off x="4635500" y="1802482"/>
+            <a:ext cx="203200" cy="203200"/>
+          </a:xfrm>
+          <a:prstGeom prst="rect">
+            <a:avLst/>
+          </a:prstGeom>
+        </p:spPr>
+      </p:pic>
+      <p:sp>
+        <p:nvSpPr>
+          <p:cNvPr id="9" name="Text 5"/>
+          <p:cNvSpPr/>
+          <p:nvPr/>
+        </p:nvSpPr>
+        <p:spPr>
+          <a:xfrm>
+            <a:off x="4914900" y="1766962"/>
+            <a:ext cx="1399778" cy="299707"/>
+          </a:xfrm>
+          <a:prstGeom prst="rect">
+            <a:avLst/>
+          </a:prstGeom>
+          <a:noFill/>
+          <a:ln/>
+        </p:spPr>
+        <p:txBody>
+          <a:bodyPr wrap="square" lIns="0" tIns="0" rIns="0" bIns="0" rtlCol="0" anchor="t">
+            <a:normAutofit/>
+          </a:bodyPr>
+          <a:lstStyle/>
+          <a:p>
+            <a:pPr algn="l" indent="0" marL="0">
+              <a:lnSpc>
+                <a:spcPts val="2160"/>
+              </a:lnSpc>
+              <a:buNone/>
+            </a:pPr>
+            <a:r>
+              <a:rPr lang="en-US" sz="1800" b="1" dirty="0">
+                <a:solidFill>
+                  <a:srgbClr val="B4501A"/>
+                </a:solidFill>
+                <a:latin typeface="IBM Plex Sans" pitchFamily="34" charset="0"/>
+                <a:ea typeface="IBM Plex Sans" pitchFamily="34" charset="-122"/>
+                <a:cs typeface="IBM Plex Sans" pitchFamily="34" charset="-120"/>
+              </a:rPr>
+              <a:t>Velocidad</a:t>
+            </a:r>
+            <a:endParaRPr lang="en-US" sz="1800" dirty="0"/>
+          </a:p>
+        </p:txBody>
+      </p:sp>
+      <p:sp>
+        <p:nvSpPr>
+          <p:cNvPr id="10" name="Text 6"/>
+          <p:cNvSpPr/>
+          <p:nvPr/>
+        </p:nvSpPr>
+        <p:spPr>
+          <a:xfrm>
+            <a:off x="4720844" y="2168265"/>
+            <a:ext cx="2915666" cy="1511300"/>
+          </a:xfrm>
+          <a:prstGeom prst="rect">
+            <a:avLst/>
+          </a:prstGeom>
+          <a:noFill/>
+          <a:ln/>
+        </p:spPr>
+        <p:txBody>
+          <a:bodyPr wrap="square" lIns="0" tIns="0" rIns="0" bIns="0" rtlCol="0" anchor="t">
+            <a:normAutofit/>
+          </a:bodyPr>
+          <a:lstStyle/>
+          <a:p>
+            <a:pPr algn="l" marL="168656" indent="-168656">
+              <a:lnSpc>
+                <a:spcPts val="1950"/>
+              </a:lnSpc>
+              <a:buSzPct val="100000"/>
+              <a:buChar char="•"/>
+            </a:pPr>
+            <a:r>
+              <a:rPr lang="en-US" sz="1300" dirty="0">
+                <a:solidFill>
+                  <a:srgbClr val="3E4C5E"/>
+                </a:solidFill>
+                <a:latin typeface="IBM Plex Sans" pitchFamily="34" charset="0"/>
+                <a:ea typeface="IBM Plex Sans" pitchFamily="34" charset="-122"/>
+                <a:cs typeface="IBM Plex Sans" pitchFamily="34" charset="-120"/>
+              </a:rPr>
+              <a:t>Vista previa DTU: de 12 s a 35 ms</a:t>
+            </a:r>
+            <a:endParaRPr lang="en-US" sz="1300" dirty="0"/>
+          </a:p>
+          <a:p>
+            <a:pPr algn="l" marL="168656" indent="-168656">
+              <a:lnSpc>
+                <a:spcPts val="1950"/>
+              </a:lnSpc>
+              <a:buSzPct val="100000"/>
+              <a:buChar char="•"/>
+            </a:pPr>
+            <a:r>
+              <a:rPr lang="en-US" sz="1300" dirty="0">
+                <a:solidFill>
+                  <a:srgbClr val="3E4C5E"/>
+                </a:solidFill>
+                <a:latin typeface="IBM Plex Sans" pitchFamily="34" charset="0"/>
+                <a:ea typeface="IBM Plex Sans" pitchFamily="34" charset="-122"/>
+                <a:cs typeface="IBM Plex Sans" pitchFamily="34" charset="-120"/>
+              </a:rPr>
+              <a:t>Dashboard de Ocupación precalculado</a:t>
+            </a:r>
+            <a:endParaRPr lang="en-US" sz="1300" dirty="0"/>
+          </a:p>
+          <a:p>
+            <a:pPr algn="l" marL="168656" indent="-168656">
+              <a:lnSpc>
+                <a:spcPts val="1950"/>
+              </a:lnSpc>
+              <a:buSzPct val="100000"/>
+              <a:buChar char="•"/>
+            </a:pPr>
+            <a:r>
+              <a:rPr lang="en-US" sz="1300" dirty="0">
+                <a:solidFill>
+                  <a:srgbClr val="3E4C5E"/>
+                </a:solidFill>
+                <a:latin typeface="IBM Plex Sans" pitchFamily="34" charset="0"/>
+                <a:ea typeface="IBM Plex Sans" pitchFamily="34" charset="-122"/>
+                <a:cs typeface="IBM Plex Sans" pitchFamily="34" charset="-120"/>
+              </a:rPr>
+              <a:t>Búsquedas en menos de 1 segundo</a:t>
+            </a:r>
+            <a:endParaRPr lang="en-US" sz="1300" dirty="0"/>
+          </a:p>
+        </p:txBody>
+      </p:sp>
+      <p:sp>
+        <p:nvSpPr>
+          <p:cNvPr id="11" name="Shape 7"/>
+          <p:cNvSpPr/>
+          <p:nvPr/>
+        </p:nvSpPr>
+        <p:spPr>
+          <a:xfrm>
+            <a:off x="7995709" y="1537295"/>
+            <a:ext cx="3380317" cy="2346523"/>
+          </a:xfrm>
+          <a:prstGeom prst="roundRect">
+            <a:avLst>
+              <a:gd name="adj" fmla="val 4195"/>
+            </a:avLst>
+          </a:prstGeom>
+          <a:solidFill>
+            <a:srgbClr val="FCFDFE"/>
+          </a:solidFill>
+          <a:ln w="6350">
+            <a:solidFill>
+              <a:srgbClr val="9AA8B8"/>
+            </a:solidFill>
+            <a:prstDash val="solid"/>
+          </a:ln>
+        </p:spPr>
+      </p:sp>
+      <p:pic>
+        <p:nvPicPr>
+          <p:cNvPr id="12" name="Image 2" descr="Lightbulb">    </p:cNvPr>
+          <p:cNvPicPr>
+            <a:picLocks noChangeAspect="1"/>
+          </p:cNvPicPr>
+          <p:nvPr/>
+        </p:nvPicPr>
+        <p:blipFill>
+          <a:blip r:embed="rId3"/>
+          <a:srcRect l="0" r="0" t="0" b="0"/>
+          <a:stretch/>
+        </p:blipFill>
+        <p:spPr>
+          <a:xfrm>
+            <a:off x="8225367" y="1802482"/>
+            <a:ext cx="203200" cy="203200"/>
+          </a:xfrm>
+          <a:prstGeom prst="rect">
+            <a:avLst/>
+          </a:prstGeom>
+        </p:spPr>
+      </p:pic>
+      <p:sp>
+        <p:nvSpPr>
+          <p:cNvPr id="13" name="Text 8"/>
+          <p:cNvSpPr/>
+          <p:nvPr/>
+        </p:nvSpPr>
+        <p:spPr>
+          <a:xfrm>
+            <a:off x="8504767" y="1766962"/>
+            <a:ext cx="2597468" cy="299707"/>
+          </a:xfrm>
+          <a:prstGeom prst="rect">
+            <a:avLst/>
+          </a:prstGeom>
+          <a:noFill/>
+          <a:ln/>
+        </p:spPr>
+        <p:txBody>
+          <a:bodyPr wrap="square" lIns="0" tIns="0" rIns="0" bIns="0" rtlCol="0" anchor="t">
+            <a:normAutofit/>
+          </a:bodyPr>
+          <a:lstStyle/>
+          <a:p>
+            <a:pPr algn="l" indent="0" marL="0">
+              <a:lnSpc>
+                <a:spcPts val="2160"/>
+              </a:lnSpc>
+              <a:buNone/>
+            </a:pPr>
+            <a:r>
+              <a:rPr lang="en-US" sz="1800" b="1" dirty="0">
+                <a:solidFill>
+                  <a:srgbClr val="4A5868"/>
+                </a:solidFill>
+                <a:latin typeface="IBM Plex Sans" pitchFamily="34" charset="0"/>
+                <a:ea typeface="IBM Plex Sans" pitchFamily="34" charset="-122"/>
+                <a:cs typeface="IBM Plex Sans" pitchFamily="34" charset="-120"/>
+              </a:rPr>
+              <a:t>Confiabilidad</a:t>
+            </a:r>
+            <a:endParaRPr lang="en-US" sz="1800" dirty="0"/>
+          </a:p>
+        </p:txBody>
+      </p:sp>
+      <p:sp>
+        <p:nvSpPr>
+          <p:cNvPr id="14" name="Text 9"/>
+          <p:cNvSpPr/>
+          <p:nvPr/>
+        </p:nvSpPr>
+        <p:spPr>
+          <a:xfrm>
+            <a:off x="8310711" y="2168265"/>
+            <a:ext cx="2915666" cy="1511300"/>
+          </a:xfrm>
+          <a:prstGeom prst="rect">
+            <a:avLst/>
+          </a:prstGeom>
+          <a:noFill/>
+          <a:ln/>
+        </p:spPr>
+        <p:txBody>
+          <a:bodyPr wrap="square" lIns="0" tIns="0" rIns="0" bIns="0" rtlCol="0" anchor="t">
+            <a:normAutofit/>
+          </a:bodyPr>
+          <a:lstStyle/>
+          <a:p>
+            <a:pPr algn="l" marL="168656" indent="-168656">
+              <a:lnSpc>
+                <a:spcPts val="1950"/>
+              </a:lnSpc>
+              <a:buSzPct val="100000"/>
+              <a:buChar char="•"/>
+            </a:pPr>
+            <a:r>
+              <a:rPr lang="en-US" sz="1300" dirty="0">
+                <a:solidFill>
+                  <a:srgbClr val="3E4C5E"/>
+                </a:solidFill>
+                <a:latin typeface="IBM Plex Sans" pitchFamily="34" charset="0"/>
+                <a:ea typeface="IBM Plex Sans" pitchFamily="34" charset="-122"/>
+                <a:cs typeface="IBM Plex Sans" pitchFamily="34" charset="-120"/>
+              </a:rPr>
+              <a:t>25 pruebas automáticas protegen el formato DTU</a:t>
+            </a:r>
+            <a:endParaRPr lang="en-US" sz="1300" dirty="0"/>
+          </a:p>
+          <a:p>
+            <a:pPr algn="l" marL="168656" indent="-168656">
+              <a:lnSpc>
+                <a:spcPts val="1950"/>
+              </a:lnSpc>
+              <a:buSzPct val="100000"/>
+              <a:buChar char="•"/>
+            </a:pPr>
+            <a:r>
+              <a:rPr lang="en-US" sz="1300" dirty="0">
+                <a:solidFill>
+                  <a:srgbClr val="3E4C5E"/>
+                </a:solidFill>
+                <a:latin typeface="IBM Plex Sans" pitchFamily="34" charset="0"/>
+                <a:ea typeface="IBM Plex Sans" pitchFamily="34" charset="-122"/>
+                <a:cs typeface="IBM Plex Sans" pitchFamily="34" charset="-120"/>
+              </a:rPr>
+              <a:t>Respaldo diario automático de las bases</a:t>
+            </a:r>
+            <a:endParaRPr lang="en-US" sz="1300" dirty="0"/>
+          </a:p>
+          <a:p>
+            <a:pPr algn="l" marL="168656" indent="-168656">
+              <a:lnSpc>
+                <a:spcPts val="1950"/>
+              </a:lnSpc>
+              <a:buSzPct val="100000"/>
+              <a:buChar char="•"/>
+            </a:pPr>
+            <a:r>
+              <a:rPr lang="en-US" sz="1300" dirty="0">
+                <a:solidFill>
+                  <a:srgbClr val="3E4C5E"/>
+                </a:solidFill>
+                <a:latin typeface="IBM Plex Sans" pitchFamily="34" charset="0"/>
+                <a:ea typeface="IBM Plex Sans" pitchFamily="34" charset="-122"/>
+                <a:cs typeface="IBM Plex Sans" pitchFamily="34" charset="-120"/>
+              </a:rPr>
+              <a:t>Errores con código de referencia</a:t>
+            </a:r>
+            <a:endParaRPr lang="en-US" sz="1300" dirty="0"/>
+          </a:p>
+        </p:txBody>
+      </p:sp>
+      <p:sp>
+        <p:nvSpPr>
+          <p:cNvPr id="15" name="Text 10"/>
+          <p:cNvSpPr/>
+          <p:nvPr/>
+        </p:nvSpPr>
+        <p:spPr>
+          <a:xfrm>
+            <a:off x="812800" y="6238280"/>
+            <a:ext cx="3958273" cy="238720"/>
+          </a:xfrm>
+          <a:prstGeom prst="rect">
+            <a:avLst/>
+          </a:prstGeom>
+          <a:noFill/>
+          <a:ln/>
+        </p:spPr>
+        <p:txBody>
+          <a:bodyPr wrap="square" lIns="0" tIns="0" rIns="0" bIns="0" rtlCol="0" anchor="t">
+            <a:normAutofit/>
+          </a:bodyPr>
+          <a:lstStyle/>
+          <a:p>
+            <a:pPr algn="l" indent="0" marL="0">
+              <a:lnSpc>
+                <a:spcPts val="1680"/>
+              </a:lnSpc>
+              <a:buNone/>
+            </a:pPr>
+            <a:r>
+              <a:rPr lang="en-US" sz="1200" dirty="0">
+                <a:solidFill>
+                  <a:srgbClr val="66758A"/>
+                </a:solidFill>
+                <a:latin typeface="IBM Plex Sans" pitchFamily="34" charset="0"/>
+                <a:ea typeface="IBM Plex Sans" pitchFamily="34" charset="-122"/>
+                <a:cs typeface="IBM Plex Sans" pitchFamily="34" charset="-120"/>
+              </a:rPr>
+              <a:t>PW Extended App · Iniciativa en desarrollo</a:t>
+            </a:r>
+            <a:endParaRPr lang="en-US" sz="1200" dirty="0"/>
+          </a:p>
+        </p:txBody>
+      </p:sp>
+      <p:sp>
+        <p:nvSpPr>
+          <p:cNvPr id="16" name="Text 11"/>
+          <p:cNvSpPr/>
+          <p:nvPr/>
+        </p:nvSpPr>
+        <p:spPr>
+          <a:xfrm>
+            <a:off x="11145507" y="6238280"/>
+            <a:ext cx="233693" cy="238720"/>
+          </a:xfrm>
+          <a:prstGeom prst="rect">
+            <a:avLst/>
+          </a:prstGeom>
+          <a:noFill/>
+          <a:ln/>
+        </p:spPr>
+        <p:txBody>
+          <a:bodyPr wrap="square" lIns="0" tIns="0" rIns="0" bIns="0" rtlCol="0" anchor="t">
+            <a:normAutofit/>
+          </a:bodyPr>
+          <a:lstStyle/>
+          <a:p>
+            <a:pPr algn="r" indent="0" marL="0">
+              <a:lnSpc>
+                <a:spcPts val="1680"/>
+              </a:lnSpc>
+              <a:buNone/>
+            </a:pPr>
+            <a:r>
+              <a:rPr lang="en-US" sz="1200" dirty="0">
+                <a:solidFill>
+                  <a:srgbClr val="66758A"/>
+                </a:solidFill>
+                <a:latin typeface="IBM Plex Sans" pitchFamily="34" charset="0"/>
+                <a:ea typeface="IBM Plex Sans" pitchFamily="34" charset="-122"/>
+                <a:cs typeface="IBM Plex Sans" pitchFamily="34" charset="-120"/>
+              </a:rPr>
+              <a:t>14</a:t>
+            </a:r>
+            <a:endParaRPr lang="en-US" sz="1200" dirty="0"/>
+          </a:p>
+        </p:txBody>
+      </p:sp>
+    </p:spTree>
+  </p:cSld>
+  <p:clrMapOvr>
+    <a:masterClrMapping/>
+  </p:clrMapOvr>
+</p:sld>
+</file>
+
+<file path=ppt/slides/slide21.xml><?xml version="1.0" encoding="utf-8"?>
+<p:sld xmlns:a="http://schemas.openxmlformats.org/drawingml/2006/main" xmlns:r="http://schemas.openxmlformats.org/officeDocument/2006/relationships" xmlns:p="http://schemas.openxmlformats.org/presentationml/2006/main">
+  <p:cSld name="Slide 12">
+    <p:bg>
+      <p:bgPr>
+        <a:solidFill>
+          <a:srgbClr val="E9EEF3"/>
+        </a:solidFill>
+      </p:bgPr>
+    </p:bg>
+    <p:spTree>
+      <p:nvGrpSpPr>
+        <p:cNvPr id="1" name=""/>
+        <p:cNvGrpSpPr/>
+        <p:nvPr/>
+      </p:nvGrpSpPr>
+      <p:grpSpPr>
+        <a:xfrm>
+          <a:off x="0" y="0"/>
+          <a:ext cx="0" cy="0"/>
+          <a:chOff x="0" y="0"/>
+          <a:chExt cx="0" cy="0"/>
+        </a:xfrm>
+      </p:grpSpPr>
+      <p:sp>
+        <p:nvSpPr>
+          <p:cNvPr id="2" name="Text 0"/>
+          <p:cNvSpPr/>
+          <p:nvPr/>
+        </p:nvSpPr>
+        <p:spPr>
+          <a:xfrm>
+            <a:off x="812800" y="812800"/>
+            <a:ext cx="5223475" cy="238720"/>
+          </a:xfrm>
+          <a:prstGeom prst="rect">
+            <a:avLst/>
+          </a:prstGeom>
+          <a:noFill/>
+          <a:ln/>
+        </p:spPr>
+        <p:txBody>
+          <a:bodyPr wrap="square" lIns="0" tIns="0" rIns="0" bIns="0" rtlCol="0" anchor="t">
+            <a:normAutofit/>
+          </a:bodyPr>
+          <a:lstStyle/>
+          <a:p>
+            <a:pPr algn="l" indent="0" marL="0">
+              <a:lnSpc>
+                <a:spcPts val="1680"/>
+              </a:lnSpc>
+              <a:buNone/>
+            </a:pPr>
+            <a:r>
+              <a:rPr lang="en-US" sz="1200" b="1" spc="100" kern="0" dirty="0">
+                <a:solidFill>
+                  <a:srgbClr val="0369A1"/>
+                </a:solidFill>
+                <a:latin typeface="IBM Plex Mono" pitchFamily="49" charset="0"/>
+                <a:ea typeface="IBM Plex Mono" pitchFamily="49" charset="-122"/>
+                <a:cs typeface="IBM Plex Mono" pitchFamily="49" charset="-120"/>
+              </a:rPr>
+              <a:t>MOCKUP 4 · OCUPACIÓN EDIFICIOS</a:t>
+            </a:r>
+            <a:endParaRPr lang="en-US" sz="1200" dirty="0"/>
+          </a:p>
+        </p:txBody>
+      </p:sp>
+      <p:sp>
+        <p:nvSpPr>
+          <p:cNvPr id="3" name="Text 1"/>
+          <p:cNvSpPr/>
+          <p:nvPr>
+            <p:ph type="title"/>
+          </p:nvPr>
+        </p:nvSpPr>
+        <p:spPr>
+          <a:xfrm>
+            <a:off x="812800" y="1102320"/>
+            <a:ext cx="6085602" cy="434314"/>
+          </a:xfrm>
+          <a:prstGeom prst="rect">
+            <a:avLst/>
+          </a:prstGeom>
+          <a:noFill/>
+          <a:ln/>
+        </p:spPr>
+        <p:txBody>
+          <a:bodyPr wrap="square" lIns="0" tIns="0" rIns="0" bIns="0" rtlCol="0" anchor="t">
+            <a:normAutofit/>
+          </a:bodyPr>
+          <a:lstStyle/>
+          <a:p>
+            <a:pPr algn="l" indent="0" marL="0">
+              <a:lnSpc>
+                <a:spcPts val="3220"/>
+              </a:lnSpc>
+              <a:buNone/>
+            </a:pPr>
+            <a:r>
+              <a:rPr lang="en-US" sz="2800" b="1" i="0" dirty="0">
+                <a:solidFill>
+                  <a:srgbClr val="0E1A2B"/>
+                </a:solidFill>
+                <a:latin typeface="IBM Plex Sans" pitchFamily="34" charset="0"/>
+                <a:ea typeface="IBM Plex Sans" pitchFamily="34" charset="-122"/>
+                <a:cs typeface="IBM Plex Sans" pitchFamily="34" charset="-120"/>
+              </a:rPr>
+              <a:t>Las marcaciones, a un clic</a:t>
+            </a:r>
+            <a:endParaRPr lang="en-US" sz="2800" dirty="0"/>
+          </a:p>
+        </p:txBody>
+      </p:sp>
+      <p:sp>
+        <p:nvSpPr>
+          <p:cNvPr id="4" name="Text 2"/>
+          <p:cNvSpPr/>
+          <p:nvPr/>
+        </p:nvSpPr>
+        <p:spPr>
+          <a:xfrm>
+            <a:off x="9926109" y="1191022"/>
+            <a:ext cx="1449917" cy="317037"/>
+          </a:xfrm>
+          <a:prstGeom prst="roundRect">
+            <a:avLst>
+              <a:gd name="adj" fmla="val 50000"/>
+            </a:avLst>
+          </a:prstGeom>
+          <a:solidFill>
+            <a:srgbClr val="FCFDFE"/>
+          </a:solidFill>
+          <a:ln w="6350">
+            <a:solidFill>
+              <a:srgbClr val="C9D3DE"/>
+            </a:solidFill>
+            <a:prstDash val="solid"/>
+          </a:ln>
+        </p:spPr>
+        <p:txBody>
+          <a:bodyPr wrap="none" lIns="0" tIns="0" rIns="0" bIns="0" rtlCol="0" anchor="ctr">
+            <a:normAutofit/>
+          </a:bodyPr>
+          <a:lstStyle/>
+          <a:p>
+            <a:pPr algn="ctr" indent="0" marL="0">
+              <a:lnSpc>
+                <a:spcPts val="1680"/>
+              </a:lnSpc>
+              <a:buNone/>
+            </a:pPr>
+            <a:r>
+              <a:rPr lang="en-US" sz="1200" dirty="0">
+                <a:solidFill>
+                  <a:srgbClr val="3E4C5E"/>
+                </a:solidFill>
+                <a:latin typeface="IBM Plex Sans" pitchFamily="34" charset="0"/>
+                <a:ea typeface="IBM Plex Sans" pitchFamily="34" charset="-122"/>
+                <a:cs typeface="IBM Plex Sans" pitchFamily="34" charset="-120"/>
+              </a:rPr>
+              <a:t>Datos de ejemplo</a:t>
+            </a:r>
+            <a:endParaRPr lang="en-US" sz="1200" dirty="0"/>
+          </a:p>
+        </p:txBody>
+      </p:sp>
+      <p:sp>
+        <p:nvSpPr>
+          <p:cNvPr id="5" name="Shape 3"/>
+          <p:cNvSpPr/>
+          <p:nvPr/>
+        </p:nvSpPr>
+        <p:spPr>
+          <a:xfrm>
+            <a:off x="815975" y="1717613"/>
+            <a:ext cx="10560050" cy="3911600"/>
+          </a:xfrm>
+          <a:prstGeom prst="roundRect">
+            <a:avLst>
+              <a:gd name="adj" fmla="val 2516"/>
+            </a:avLst>
+          </a:prstGeom>
+          <a:solidFill>
+            <a:srgbClr val="090D16"/>
+          </a:solidFill>
+          <a:ln w="6350">
+            <a:solidFill>
+              <a:srgbClr val="24405F"/>
+            </a:solidFill>
+            <a:prstDash val="solid"/>
+          </a:ln>
+        </p:spPr>
+      </p:sp>
+      <p:sp>
+        <p:nvSpPr>
+          <p:cNvPr id="6" name="Shape 4"/>
+          <p:cNvSpPr/>
+          <p:nvPr/>
+        </p:nvSpPr>
+        <p:spPr>
+          <a:xfrm>
+            <a:off x="817033" y="1718667"/>
+            <a:ext cx="10557934" cy="416520"/>
+          </a:xfrm>
+          <a:custGeom>
+            <a:avLst/>
+            <a:gdLst/>
+            <a:ahLst/>
+            <a:cxnLst/>
+            <a:rect l="l" t="t" r="r" b="b"/>
+            <a:pathLst>
+              <a:path w="10557934" h="416520">
+                <a:moveTo>
+                  <a:pt x="0" y="97367"/>
+                </a:moveTo>
+                <a:arcTo hR="97367" wR="97367" stAng="10800000" swAng="5400000"/>
+                <a:lnTo>
+                  <a:pt x="10460567" y="0"/>
+                </a:lnTo>
+                <a:arcTo hR="97367" wR="97367" stAng="16200000" swAng="5400000"/>
+                <a:lnTo>
+                  <a:pt x="10557934" y="416520"/>
+                </a:lnTo>
+                <a:lnTo>
+                  <a:pt x="0" y="416520"/>
+                </a:lnTo>
+                <a:close/>
+              </a:path>
+            </a:pathLst>
+          </a:custGeom>
+          <a:solidFill>
+            <a:srgbClr val="1A2333"/>
+          </a:solidFill>
+          <a:ln/>
+        </p:spPr>
+      </p:sp>
+      <p:sp>
+        <p:nvSpPr>
+          <p:cNvPr id="7" name="Shape 5"/>
+          <p:cNvSpPr/>
+          <p:nvPr/>
+        </p:nvSpPr>
+        <p:spPr>
+          <a:xfrm>
+            <a:off x="944033" y="1882446"/>
+            <a:ext cx="88900" cy="88900"/>
+          </a:xfrm>
+          <a:prstGeom prst="roundRect">
+            <a:avLst>
+              <a:gd name="adj" fmla="val 50000"/>
+            </a:avLst>
+          </a:prstGeom>
+          <a:solidFill>
+            <a:srgbClr val="F87171"/>
+          </a:solidFill>
+          <a:ln/>
+        </p:spPr>
+      </p:sp>
+      <p:sp>
+        <p:nvSpPr>
+          <p:cNvPr id="8" name="Shape 6"/>
+          <p:cNvSpPr/>
+          <p:nvPr/>
+        </p:nvSpPr>
+        <p:spPr>
+          <a:xfrm>
+            <a:off x="1109133" y="1882446"/>
+            <a:ext cx="88900" cy="88900"/>
+          </a:xfrm>
+          <a:prstGeom prst="roundRect">
+            <a:avLst>
+              <a:gd name="adj" fmla="val 50000"/>
+            </a:avLst>
+          </a:prstGeom>
+          <a:solidFill>
+            <a:srgbClr val="FBBF24"/>
+          </a:solidFill>
+          <a:ln/>
+        </p:spPr>
+      </p:sp>
+      <p:sp>
+        <p:nvSpPr>
+          <p:cNvPr id="9" name="Shape 7"/>
+          <p:cNvSpPr/>
+          <p:nvPr/>
+        </p:nvSpPr>
+        <p:spPr>
+          <a:xfrm>
+            <a:off x="1274233" y="1882446"/>
+            <a:ext cx="88900" cy="88900"/>
+          </a:xfrm>
+          <a:prstGeom prst="roundRect">
+            <a:avLst>
+              <a:gd name="adj" fmla="val 50000"/>
+            </a:avLst>
+          </a:prstGeom>
+          <a:solidFill>
+            <a:srgbClr val="34D399"/>
+          </a:solidFill>
+          <a:ln/>
+        </p:spPr>
+      </p:sp>
+      <p:sp>
+        <p:nvSpPr>
+          <p:cNvPr id="10" name="Text 8"/>
+          <p:cNvSpPr/>
+          <p:nvPr/>
+        </p:nvSpPr>
+        <p:spPr>
+          <a:xfrm>
+            <a:off x="1439333" y="1794867"/>
+            <a:ext cx="2032000" cy="264120"/>
+          </a:xfrm>
+          <a:prstGeom prst="roundRect">
+            <a:avLst>
+              <a:gd name="adj" fmla="val 19234"/>
+            </a:avLst>
+          </a:prstGeom>
+          <a:solidFill>
+            <a:srgbClr val="0F172A"/>
+          </a:solidFill>
+          <a:ln/>
+        </p:spPr>
+        <p:txBody>
+          <a:bodyPr wrap="none" lIns="0" tIns="0" rIns="0" bIns="0" rtlCol="0" anchor="ctr">
+            <a:normAutofit/>
+          </a:bodyPr>
+          <a:lstStyle/>
+          <a:p>
+            <a:pPr algn="ctr" indent="0" marL="0">
+              <a:lnSpc>
+                <a:spcPts val="1680"/>
+              </a:lnSpc>
+              <a:buNone/>
+            </a:pPr>
+            <a:r>
+              <a:rPr lang="en-US" sz="1200" dirty="0">
+                <a:solidFill>
+                  <a:srgbClr val="94A3B8"/>
+                </a:solidFill>
+                <a:latin typeface="IBM Plex Mono" pitchFamily="49" charset="0"/>
+                <a:ea typeface="IBM Plex Mono" pitchFamily="49" charset="-122"/>
+                <a:cs typeface="IBM Plex Mono" pitchFamily="49" charset="-120"/>
+              </a:rPr>
+              <a:t>https://servidor-pw</a:t>
+            </a:r>
+            <a:endParaRPr lang="en-US" sz="1200" dirty="0"/>
+          </a:p>
+        </p:txBody>
+      </p:sp>
+      <p:sp>
+        <p:nvSpPr>
+          <p:cNvPr id="11" name="Shape 9"/>
+          <p:cNvSpPr/>
+          <p:nvPr/>
+        </p:nvSpPr>
+        <p:spPr>
+          <a:xfrm>
+            <a:off x="817033" y="2135188"/>
+            <a:ext cx="10557934" cy="471554"/>
+          </a:xfrm>
+          <a:prstGeom prst="rect">
+            <a:avLst/>
+          </a:prstGeom>
+          <a:solidFill>
+            <a:srgbClr val="0F172A"/>
+          </a:solidFill>
+          <a:ln/>
+        </p:spPr>
+      </p:sp>
+      <p:sp>
+        <p:nvSpPr>
+          <p:cNvPr id="12" name="Shape 10"/>
+          <p:cNvSpPr/>
+          <p:nvPr/>
+        </p:nvSpPr>
+        <p:spPr>
+          <a:xfrm>
+            <a:off x="817033" y="2603566"/>
+            <a:ext cx="10557934" cy="0"/>
+          </a:xfrm>
+          <a:prstGeom prst="line">
+            <a:avLst/>
+          </a:prstGeom>
+          <a:noFill/>
+          <a:ln w="6350">
+            <a:solidFill>
+              <a:srgbClr val="1E293B"/>
+            </a:solidFill>
+            <a:prstDash val="solid"/>
+          </a:ln>
+        </p:spPr>
+      </p:sp>
+      <p:sp>
+        <p:nvSpPr>
+          <p:cNvPr id="13" name="Text 11"/>
+          <p:cNvSpPr/>
+          <p:nvPr/>
+        </p:nvSpPr>
+        <p:spPr>
+          <a:xfrm>
+            <a:off x="969433" y="2253258"/>
+            <a:ext cx="1759744" cy="256514"/>
+          </a:xfrm>
+          <a:prstGeom prst="rect">
+            <a:avLst/>
+          </a:prstGeom>
+          <a:noFill/>
+          <a:ln/>
+        </p:spPr>
+        <p:txBody>
+          <a:bodyPr wrap="square" lIns="0" tIns="0" rIns="0" bIns="0" rtlCol="0" anchor="t">
+            <a:normAutofit/>
+          </a:bodyPr>
+          <a:lstStyle/>
+          <a:p>
+            <a:pPr algn="l" indent="0" marL="0">
+              <a:lnSpc>
+                <a:spcPts val="1820"/>
+              </a:lnSpc>
+              <a:buNone/>
+            </a:pPr>
+            <a:r>
+              <a:rPr lang="en-US" sz="1300" b="1" dirty="0">
+                <a:solidFill>
+                  <a:srgbClr val="F8FAFC"/>
+                </a:solidFill>
+                <a:latin typeface="IBM Plex Sans" pitchFamily="34" charset="0"/>
+                <a:ea typeface="IBM Plex Sans" pitchFamily="34" charset="-122"/>
+                <a:cs typeface="IBM Plex Sans" pitchFamily="34" charset="-120"/>
+              </a:rPr>
+              <a:t>PW Extended App</a:t>
+            </a:r>
+            <a:endParaRPr lang="en-US" sz="1300" dirty="0"/>
+          </a:p>
+        </p:txBody>
+      </p:sp>
+      <p:sp>
+        <p:nvSpPr>
+          <p:cNvPr id="14" name="Text 12"/>
+          <p:cNvSpPr/>
+          <p:nvPr/>
+        </p:nvSpPr>
+        <p:spPr>
+          <a:xfrm>
+            <a:off x="7315928" y="2224088"/>
+            <a:ext cx="946150" cy="289520"/>
+          </a:xfrm>
+          <a:prstGeom prst="roundRect">
+            <a:avLst>
+              <a:gd name="adj" fmla="val 17546"/>
+            </a:avLst>
+          </a:prstGeom>
+          <a:solidFill>
+            <a:srgbClr val="0284C7"/>
+          </a:solidFill>
+          <a:ln/>
+        </p:spPr>
+        <p:txBody>
+          <a:bodyPr wrap="none" lIns="0" tIns="0" rIns="0" bIns="0" rtlCol="0" anchor="ctr">
+            <a:normAutofit/>
+          </a:bodyPr>
+          <a:lstStyle/>
+          <a:p>
+            <a:pPr algn="ctr" indent="0" marL="0">
+              <a:lnSpc>
+                <a:spcPts val="1680"/>
+              </a:lnSpc>
+              <a:buNone/>
+            </a:pPr>
+            <a:r>
+              <a:rPr lang="en-US" sz="1200" dirty="0">
+                <a:solidFill>
+                  <a:srgbClr val="F8FAFC"/>
+                </a:solidFill>
+                <a:latin typeface="IBM Plex Sans" pitchFamily="34" charset="0"/>
+                <a:ea typeface="IBM Plex Sans" pitchFamily="34" charset="-122"/>
+                <a:cs typeface="IBM Plex Sans" pitchFamily="34" charset="-120"/>
+              </a:rPr>
+              <a:t>Dashboard</a:t>
+            </a:r>
+            <a:endParaRPr lang="en-US" sz="1200" dirty="0"/>
+          </a:p>
+        </p:txBody>
+      </p:sp>
+      <p:sp>
+        <p:nvSpPr>
+          <p:cNvPr id="15" name="Text 13"/>
+          <p:cNvSpPr/>
+          <p:nvPr/>
+        </p:nvSpPr>
+        <p:spPr>
+          <a:xfrm>
+            <a:off x="8439878" y="2262188"/>
+            <a:ext cx="1223724" cy="238720"/>
+          </a:xfrm>
+          <a:prstGeom prst="rect">
+            <a:avLst/>
+          </a:prstGeom>
+          <a:noFill/>
+          <a:ln/>
+        </p:spPr>
+        <p:txBody>
+          <a:bodyPr wrap="square" lIns="0" tIns="0" rIns="0" bIns="0" rtlCol="0" anchor="t">
+            <a:normAutofit/>
+          </a:bodyPr>
+          <a:lstStyle/>
+          <a:p>
+            <a:pPr algn="l" indent="0" marL="0">
+              <a:lnSpc>
+                <a:spcPts val="1680"/>
+              </a:lnSpc>
+              <a:buNone/>
+            </a:pPr>
+            <a:r>
+              <a:rPr lang="en-US" sz="1200" dirty="0">
+                <a:solidFill>
+                  <a:srgbClr val="94A3B8"/>
+                </a:solidFill>
+                <a:latin typeface="IBM Plex Sans" pitchFamily="34" charset="0"/>
+                <a:ea typeface="IBM Plex Sans" pitchFamily="34" charset="-122"/>
+                <a:cs typeface="IBM Plex Sans" pitchFamily="34" charset="-120"/>
+              </a:rPr>
+              <a:t>Consultar</a:t>
+            </a:r>
+            <a:endParaRPr lang="en-US" sz="1200" dirty="0"/>
+          </a:p>
+        </p:txBody>
+      </p:sp>
+      <p:sp>
+        <p:nvSpPr>
+          <p:cNvPr id="16" name="Text 14"/>
+          <p:cNvSpPr/>
+          <p:nvPr/>
+        </p:nvSpPr>
+        <p:spPr>
+          <a:xfrm>
+            <a:off x="9713648" y="2262188"/>
+            <a:ext cx="688975" cy="238720"/>
+          </a:xfrm>
+          <a:prstGeom prst="rect">
+            <a:avLst/>
+          </a:prstGeom>
+          <a:noFill/>
+          <a:ln/>
+        </p:spPr>
+        <p:txBody>
+          <a:bodyPr wrap="square" lIns="0" tIns="0" rIns="0" bIns="0" rtlCol="0" anchor="t">
+            <a:normAutofit/>
+          </a:bodyPr>
+          <a:lstStyle/>
+          <a:p>
+            <a:pPr algn="l" indent="0" marL="0">
+              <a:lnSpc>
+                <a:spcPts val="1680"/>
+              </a:lnSpc>
+              <a:buNone/>
+            </a:pPr>
+            <a:r>
+              <a:rPr lang="en-US" sz="1200" dirty="0">
+                <a:solidFill>
+                  <a:srgbClr val="94A3B8"/>
+                </a:solidFill>
+                <a:latin typeface="IBM Plex Sans" pitchFamily="34" charset="0"/>
+                <a:ea typeface="IBM Plex Sans" pitchFamily="34" charset="-122"/>
+                <a:cs typeface="IBM Plex Sans" pitchFamily="34" charset="-120"/>
+              </a:rPr>
+              <a:t>Cargar</a:t>
+            </a:r>
+            <a:endParaRPr lang="en-US" sz="1200" dirty="0"/>
+          </a:p>
+        </p:txBody>
+      </p:sp>
+      <p:sp>
+        <p:nvSpPr>
+          <p:cNvPr id="17" name="Text 15"/>
+          <p:cNvSpPr/>
+          <p:nvPr/>
+        </p:nvSpPr>
+        <p:spPr>
+          <a:xfrm>
+            <a:off x="10541794" y="2262188"/>
+            <a:ext cx="725488" cy="238720"/>
+          </a:xfrm>
+          <a:prstGeom prst="rect">
+            <a:avLst/>
+          </a:prstGeom>
+          <a:noFill/>
+          <a:ln/>
+        </p:spPr>
+        <p:txBody>
+          <a:bodyPr wrap="square" lIns="0" tIns="0" rIns="0" bIns="0" rtlCol="0" anchor="t">
+            <a:normAutofit/>
+          </a:bodyPr>
+          <a:lstStyle/>
+          <a:p>
+            <a:pPr algn="l" indent="0" marL="0">
+              <a:lnSpc>
+                <a:spcPts val="1680"/>
+              </a:lnSpc>
+              <a:buNone/>
+            </a:pPr>
+            <a:r>
+              <a:rPr lang="en-US" sz="1200" dirty="0">
+                <a:solidFill>
+                  <a:srgbClr val="94A3B8"/>
+                </a:solidFill>
+                <a:latin typeface="IBM Plex Sans" pitchFamily="34" charset="0"/>
+                <a:ea typeface="IBM Plex Sans" pitchFamily="34" charset="-122"/>
+                <a:cs typeface="IBM Plex Sans" pitchFamily="34" charset="-120"/>
+              </a:rPr>
+              <a:t>Archivos</a:t>
+            </a:r>
+            <a:endParaRPr lang="en-US" sz="1200" dirty="0"/>
+          </a:p>
+        </p:txBody>
+      </p:sp>
+      <p:sp>
+        <p:nvSpPr>
+          <p:cNvPr id="18" name="Shape 16"/>
+          <p:cNvSpPr/>
+          <p:nvPr/>
+        </p:nvSpPr>
+        <p:spPr>
+          <a:xfrm>
+            <a:off x="972608" y="2762318"/>
+            <a:ext cx="2461683" cy="926637"/>
+          </a:xfrm>
+          <a:prstGeom prst="roundRect">
+            <a:avLst>
+              <a:gd name="adj" fmla="val 7881"/>
+            </a:avLst>
+          </a:prstGeom>
+          <a:solidFill>
+            <a:srgbClr val="111827"/>
+          </a:solidFill>
+          <a:ln w="6350">
+            <a:solidFill>
+              <a:srgbClr val="1E293B"/>
+            </a:solidFill>
+            <a:prstDash val="solid"/>
+          </a:ln>
+        </p:spPr>
+      </p:sp>
+      <p:sp>
+        <p:nvSpPr>
+          <p:cNvPr id="19" name="Text 17"/>
+          <p:cNvSpPr/>
+          <p:nvPr/>
+        </p:nvSpPr>
+        <p:spPr>
+          <a:xfrm>
+            <a:off x="1126067" y="2915779"/>
+            <a:ext cx="2219410" cy="238720"/>
+          </a:xfrm>
+          <a:prstGeom prst="rect">
+            <a:avLst/>
+          </a:prstGeom>
+          <a:noFill/>
+          <a:ln/>
+        </p:spPr>
+        <p:txBody>
+          <a:bodyPr wrap="square" lIns="0" tIns="0" rIns="0" bIns="0" rtlCol="0" anchor="t">
+            <a:normAutofit/>
+          </a:bodyPr>
+          <a:lstStyle/>
+          <a:p>
+            <a:pPr algn="l" indent="0" marL="0">
+              <a:lnSpc>
+                <a:spcPts val="1680"/>
+              </a:lnSpc>
+              <a:buNone/>
+            </a:pPr>
+            <a:r>
+              <a:rPr lang="en-US" sz="1200" dirty="0">
+                <a:solidFill>
+                  <a:srgbClr val="94A3B8"/>
+                </a:solidFill>
+                <a:latin typeface="IBM Plex Sans" pitchFamily="34" charset="0"/>
+                <a:ea typeface="IBM Plex Sans" pitchFamily="34" charset="-122"/>
+                <a:cs typeface="IBM Plex Sans" pitchFamily="34" charset="-120"/>
+              </a:rPr>
+              <a:t>Marcaciones</a:t>
+            </a:r>
+            <a:endParaRPr lang="en-US" sz="1200" dirty="0"/>
+          </a:p>
+        </p:txBody>
+      </p:sp>
+      <p:sp>
+        <p:nvSpPr>
+          <p:cNvPr id="20" name="Text 18"/>
+          <p:cNvSpPr/>
+          <p:nvPr/>
+        </p:nvSpPr>
+        <p:spPr>
+          <a:xfrm>
+            <a:off x="1126067" y="3179899"/>
+            <a:ext cx="2219410" cy="381000"/>
+          </a:xfrm>
+          <a:prstGeom prst="rect">
+            <a:avLst/>
+          </a:prstGeom>
+          <a:noFill/>
+          <a:ln/>
+        </p:spPr>
+        <p:txBody>
+          <a:bodyPr wrap="square" lIns="0" tIns="0" rIns="0" bIns="0" rtlCol="0" anchor="t">
+            <a:normAutofit/>
+          </a:bodyPr>
+          <a:lstStyle/>
+          <a:p>
+            <a:pPr algn="l" indent="0" marL="0">
+              <a:lnSpc>
+                <a:spcPts val="2800"/>
+              </a:lnSpc>
+              <a:buNone/>
+            </a:pPr>
+            <a:r>
+              <a:rPr lang="en-US" sz="2000" b="1" dirty="0">
+                <a:solidFill>
+                  <a:srgbClr val="F8FAFC"/>
+                </a:solidFill>
+                <a:latin typeface="IBM Plex Sans" pitchFamily="34" charset="0"/>
+                <a:ea typeface="IBM Plex Sans" pitchFamily="34" charset="-122"/>
+                <a:cs typeface="IBM Plex Sans" pitchFamily="34" charset="-120"/>
+              </a:rPr>
+              <a:t>1.853.939</a:t>
+            </a:r>
+            <a:endParaRPr lang="en-US" sz="2000" dirty="0"/>
+          </a:p>
+        </p:txBody>
+      </p:sp>
+      <p:sp>
+        <p:nvSpPr>
+          <p:cNvPr id="21" name="Shape 19"/>
+          <p:cNvSpPr/>
+          <p:nvPr/>
+        </p:nvSpPr>
+        <p:spPr>
+          <a:xfrm>
+            <a:off x="3567642" y="2762318"/>
+            <a:ext cx="2461683" cy="926637"/>
+          </a:xfrm>
+          <a:prstGeom prst="roundRect">
+            <a:avLst>
+              <a:gd name="adj" fmla="val 7881"/>
+            </a:avLst>
+          </a:prstGeom>
+          <a:solidFill>
+            <a:srgbClr val="111827"/>
+          </a:solidFill>
+          <a:ln w="6350">
+            <a:solidFill>
+              <a:srgbClr val="1E293B"/>
+            </a:solidFill>
+            <a:prstDash val="solid"/>
+          </a:ln>
+        </p:spPr>
+      </p:sp>
+      <p:sp>
+        <p:nvSpPr>
+          <p:cNvPr id="22" name="Text 20"/>
+          <p:cNvSpPr/>
+          <p:nvPr/>
+        </p:nvSpPr>
+        <p:spPr>
+          <a:xfrm>
+            <a:off x="3721100" y="2915779"/>
+            <a:ext cx="2219410" cy="238720"/>
+          </a:xfrm>
+          <a:prstGeom prst="rect">
+            <a:avLst/>
+          </a:prstGeom>
+          <a:noFill/>
+          <a:ln/>
+        </p:spPr>
+        <p:txBody>
+          <a:bodyPr wrap="square" lIns="0" tIns="0" rIns="0" bIns="0" rtlCol="0" anchor="t">
+            <a:normAutofit/>
+          </a:bodyPr>
+          <a:lstStyle/>
+          <a:p>
+            <a:pPr algn="l" indent="0" marL="0">
+              <a:lnSpc>
+                <a:spcPts val="1680"/>
+              </a:lnSpc>
+              <a:buNone/>
+            </a:pPr>
+            <a:r>
+              <a:rPr lang="en-US" sz="1200" dirty="0">
+                <a:solidFill>
+                  <a:srgbClr val="94A3B8"/>
+                </a:solidFill>
+                <a:latin typeface="IBM Plex Sans" pitchFamily="34" charset="0"/>
+                <a:ea typeface="IBM Plex Sans" pitchFamily="34" charset="-122"/>
+                <a:cs typeface="IBM Plex Sans" pitchFamily="34" charset="-120"/>
+              </a:rPr>
+              <a:t>Datos desde</a:t>
+            </a:r>
+            <a:endParaRPr lang="en-US" sz="1200" dirty="0"/>
+          </a:p>
+        </p:txBody>
+      </p:sp>
+      <p:sp>
+        <p:nvSpPr>
+          <p:cNvPr id="23" name="Text 21"/>
+          <p:cNvSpPr/>
+          <p:nvPr/>
+        </p:nvSpPr>
+        <p:spPr>
+          <a:xfrm>
+            <a:off x="3721100" y="3179899"/>
+            <a:ext cx="2219410" cy="381000"/>
+          </a:xfrm>
+          <a:prstGeom prst="rect">
+            <a:avLst/>
+          </a:prstGeom>
+          <a:noFill/>
+          <a:ln/>
+        </p:spPr>
+        <p:txBody>
+          <a:bodyPr wrap="square" lIns="0" tIns="0" rIns="0" bIns="0" rtlCol="0" anchor="t">
+            <a:normAutofit/>
+          </a:bodyPr>
+          <a:lstStyle/>
+          <a:p>
+            <a:pPr algn="l" indent="0" marL="0">
+              <a:lnSpc>
+                <a:spcPts val="2800"/>
+              </a:lnSpc>
+              <a:buNone/>
+            </a:pPr>
+            <a:r>
+              <a:rPr lang="en-US" sz="2000" b="1" dirty="0">
+                <a:solidFill>
+                  <a:srgbClr val="38BDF8"/>
+                </a:solidFill>
+                <a:latin typeface="IBM Plex Sans" pitchFamily="34" charset="0"/>
+                <a:ea typeface="IBM Plex Sans" pitchFamily="34" charset="-122"/>
+                <a:cs typeface="IBM Plex Sans" pitchFamily="34" charset="-120"/>
+              </a:rPr>
+              <a:t>01/01/2026</a:t>
+            </a:r>
+            <a:endParaRPr lang="en-US" sz="2000" dirty="0"/>
+          </a:p>
+        </p:txBody>
+      </p:sp>
+      <p:sp>
+        <p:nvSpPr>
+          <p:cNvPr id="24" name="Shape 22"/>
+          <p:cNvSpPr/>
+          <p:nvPr/>
+        </p:nvSpPr>
+        <p:spPr>
+          <a:xfrm>
+            <a:off x="6162675" y="2762318"/>
+            <a:ext cx="2461683" cy="926637"/>
+          </a:xfrm>
+          <a:prstGeom prst="roundRect">
+            <a:avLst>
+              <a:gd name="adj" fmla="val 7881"/>
+            </a:avLst>
+          </a:prstGeom>
+          <a:solidFill>
+            <a:srgbClr val="111827"/>
+          </a:solidFill>
+          <a:ln w="6350">
+            <a:solidFill>
+              <a:srgbClr val="1E293B"/>
+            </a:solidFill>
+            <a:prstDash val="solid"/>
+          </a:ln>
+        </p:spPr>
+      </p:sp>
+      <p:sp>
+        <p:nvSpPr>
+          <p:cNvPr id="25" name="Text 23"/>
+          <p:cNvSpPr/>
+          <p:nvPr/>
+        </p:nvSpPr>
+        <p:spPr>
+          <a:xfrm>
+            <a:off x="6316133" y="2915779"/>
+            <a:ext cx="2219410" cy="238720"/>
+          </a:xfrm>
+          <a:prstGeom prst="rect">
+            <a:avLst/>
+          </a:prstGeom>
+          <a:noFill/>
+          <a:ln/>
+        </p:spPr>
+        <p:txBody>
+          <a:bodyPr wrap="square" lIns="0" tIns="0" rIns="0" bIns="0" rtlCol="0" anchor="t">
+            <a:normAutofit/>
+          </a:bodyPr>
+          <a:lstStyle/>
+          <a:p>
+            <a:pPr algn="l" indent="0" marL="0">
+              <a:lnSpc>
+                <a:spcPts val="1680"/>
+              </a:lnSpc>
+              <a:buNone/>
+            </a:pPr>
+            <a:r>
+              <a:rPr lang="en-US" sz="1200" dirty="0">
+                <a:solidFill>
+                  <a:srgbClr val="94A3B8"/>
+                </a:solidFill>
+                <a:latin typeface="IBM Plex Sans" pitchFamily="34" charset="0"/>
+                <a:ea typeface="IBM Plex Sans" pitchFamily="34" charset="-122"/>
+                <a:cs typeface="IBM Plex Sans" pitchFamily="34" charset="-120"/>
+              </a:rPr>
+              <a:t>Archivos</a:t>
+            </a:r>
+            <a:endParaRPr lang="en-US" sz="1200" dirty="0"/>
+          </a:p>
+        </p:txBody>
+      </p:sp>
+      <p:sp>
+        <p:nvSpPr>
+          <p:cNvPr id="26" name="Text 24"/>
+          <p:cNvSpPr/>
+          <p:nvPr/>
+        </p:nvSpPr>
+        <p:spPr>
+          <a:xfrm>
+            <a:off x="6316133" y="3179899"/>
+            <a:ext cx="2219410" cy="381000"/>
+          </a:xfrm>
+          <a:prstGeom prst="rect">
+            <a:avLst/>
+          </a:prstGeom>
+          <a:noFill/>
+          <a:ln/>
+        </p:spPr>
+        <p:txBody>
+          <a:bodyPr wrap="square" lIns="0" tIns="0" rIns="0" bIns="0" rtlCol="0" anchor="t">
+            <a:normAutofit/>
+          </a:bodyPr>
+          <a:lstStyle/>
+          <a:p>
+            <a:pPr algn="l" indent="0" marL="0">
+              <a:lnSpc>
+                <a:spcPts val="2800"/>
+              </a:lnSpc>
+              <a:buNone/>
+            </a:pPr>
+            <a:r>
+              <a:rPr lang="en-US" sz="2000" b="1" dirty="0">
+                <a:solidFill>
+                  <a:srgbClr val="F8FAFC"/>
+                </a:solidFill>
+                <a:latin typeface="IBM Plex Sans" pitchFamily="34" charset="0"/>
+                <a:ea typeface="IBM Plex Sans" pitchFamily="34" charset="-122"/>
+                <a:cs typeface="IBM Plex Sans" pitchFamily="34" charset="-120"/>
+              </a:rPr>
+              <a:t>279</a:t>
+            </a:r>
+            <a:endParaRPr lang="en-US" sz="2000" dirty="0"/>
+          </a:p>
+        </p:txBody>
+      </p:sp>
+      <p:sp>
+        <p:nvSpPr>
+          <p:cNvPr id="27" name="Shape 25"/>
+          <p:cNvSpPr/>
+          <p:nvPr/>
+        </p:nvSpPr>
+        <p:spPr>
+          <a:xfrm>
+            <a:off x="8757709" y="2762318"/>
+            <a:ext cx="2461683" cy="926637"/>
+          </a:xfrm>
+          <a:prstGeom prst="roundRect">
+            <a:avLst>
+              <a:gd name="adj" fmla="val 7881"/>
+            </a:avLst>
+          </a:prstGeom>
+          <a:solidFill>
+            <a:srgbClr val="111827"/>
+          </a:solidFill>
+          <a:ln w="6350">
+            <a:solidFill>
+              <a:srgbClr val="1E293B"/>
+            </a:solidFill>
+            <a:prstDash val="solid"/>
+          </a:ln>
+        </p:spPr>
+      </p:sp>
+      <p:sp>
+        <p:nvSpPr>
+          <p:cNvPr id="28" name="Text 26"/>
+          <p:cNvSpPr/>
+          <p:nvPr/>
+        </p:nvSpPr>
+        <p:spPr>
+          <a:xfrm>
+            <a:off x="8911167" y="2915779"/>
+            <a:ext cx="2219410" cy="238720"/>
+          </a:xfrm>
+          <a:prstGeom prst="rect">
+            <a:avLst/>
+          </a:prstGeom>
+          <a:noFill/>
+          <a:ln/>
+        </p:spPr>
+        <p:txBody>
+          <a:bodyPr wrap="square" lIns="0" tIns="0" rIns="0" bIns="0" rtlCol="0" anchor="t">
+            <a:normAutofit/>
+          </a:bodyPr>
+          <a:lstStyle/>
+          <a:p>
+            <a:pPr algn="l" indent="0" marL="0">
+              <a:lnSpc>
+                <a:spcPts val="1680"/>
+              </a:lnSpc>
+              <a:buNone/>
+            </a:pPr>
+            <a:r>
+              <a:rPr lang="en-US" sz="1200" dirty="0">
+                <a:solidFill>
+                  <a:srgbClr val="94A3B8"/>
+                </a:solidFill>
+                <a:latin typeface="IBM Plex Sans" pitchFamily="34" charset="0"/>
+                <a:ea typeface="IBM Plex Sans" pitchFamily="34" charset="-122"/>
+                <a:cs typeface="IBM Plex Sans" pitchFamily="34" charset="-120"/>
+              </a:rPr>
+              <a:t>Personas</a:t>
+            </a:r>
+            <a:endParaRPr lang="en-US" sz="1200" dirty="0"/>
+          </a:p>
+        </p:txBody>
+      </p:sp>
+      <p:sp>
+        <p:nvSpPr>
+          <p:cNvPr id="29" name="Text 27"/>
+          <p:cNvSpPr/>
+          <p:nvPr/>
+        </p:nvSpPr>
+        <p:spPr>
+          <a:xfrm>
+            <a:off x="8911167" y="3179899"/>
+            <a:ext cx="2219410" cy="381000"/>
+          </a:xfrm>
+          <a:prstGeom prst="rect">
+            <a:avLst/>
+          </a:prstGeom>
+          <a:noFill/>
+          <a:ln/>
+        </p:spPr>
+        <p:txBody>
+          <a:bodyPr wrap="square" lIns="0" tIns="0" rIns="0" bIns="0" rtlCol="0" anchor="t">
+            <a:normAutofit/>
+          </a:bodyPr>
+          <a:lstStyle/>
+          <a:p>
+            <a:pPr algn="l" indent="0" marL="0">
+              <a:lnSpc>
+                <a:spcPts val="2800"/>
+              </a:lnSpc>
+              <a:buNone/>
+            </a:pPr>
+            <a:r>
+              <a:rPr lang="en-US" sz="2000" b="1" dirty="0">
+                <a:solidFill>
+                  <a:srgbClr val="34D399"/>
+                </a:solidFill>
+                <a:latin typeface="IBM Plex Sans" pitchFamily="34" charset="0"/>
+                <a:ea typeface="IBM Plex Sans" pitchFamily="34" charset="-122"/>
+                <a:cs typeface="IBM Plex Sans" pitchFamily="34" charset="-120"/>
+              </a:rPr>
+              <a:t>24.758</a:t>
+            </a:r>
+            <a:endParaRPr lang="en-US" sz="2000" dirty="0"/>
+          </a:p>
+        </p:txBody>
+      </p:sp>
+      <p:sp>
+        <p:nvSpPr>
+          <p:cNvPr id="30" name="Shape 28"/>
+          <p:cNvSpPr/>
+          <p:nvPr/>
+        </p:nvSpPr>
+        <p:spPr>
+          <a:xfrm>
+            <a:off x="972608" y="3847703"/>
+            <a:ext cx="10246784" cy="1624873"/>
+          </a:xfrm>
+          <a:prstGeom prst="roundRect">
+            <a:avLst>
+              <a:gd name="adj" fmla="val 4494"/>
+            </a:avLst>
+          </a:prstGeom>
+          <a:solidFill>
+            <a:srgbClr val="111827"/>
+          </a:solidFill>
+          <a:ln w="6350">
+            <a:solidFill>
+              <a:srgbClr val="1E293B"/>
+            </a:solidFill>
+            <a:prstDash val="solid"/>
+          </a:ln>
+        </p:spPr>
+      </p:sp>
+      <p:sp>
+        <p:nvSpPr>
+          <p:cNvPr id="31" name="Text 29"/>
+          <p:cNvSpPr/>
+          <p:nvPr/>
+        </p:nvSpPr>
+        <p:spPr>
+          <a:xfrm>
+            <a:off x="1126067" y="4001164"/>
+            <a:ext cx="10238063" cy="256514"/>
+          </a:xfrm>
+          <a:prstGeom prst="rect">
+            <a:avLst/>
+          </a:prstGeom>
+          <a:noFill/>
+          <a:ln/>
+        </p:spPr>
+        <p:txBody>
+          <a:bodyPr wrap="square" lIns="0" tIns="0" rIns="0" bIns="0" rtlCol="0" anchor="t">
+            <a:normAutofit/>
+          </a:bodyPr>
+          <a:lstStyle/>
+          <a:p>
+            <a:pPr algn="l" indent="0" marL="0">
+              <a:lnSpc>
+                <a:spcPts val="1820"/>
+              </a:lnSpc>
+              <a:buNone/>
+            </a:pPr>
+            <a:r>
+              <a:rPr lang="en-US" sz="1300" b="1" dirty="0">
+                <a:solidFill>
+                  <a:srgbClr val="F8FAFC"/>
+                </a:solidFill>
+                <a:latin typeface="IBM Plex Sans" pitchFamily="34" charset="0"/>
+                <a:ea typeface="IBM Plex Sans" pitchFamily="34" charset="-122"/>
+                <a:cs typeface="IBM Plex Sans" pitchFamily="34" charset="-120"/>
+              </a:rPr>
+              <a:t>Archivos cargados</a:t>
+            </a:r>
+            <a:endParaRPr lang="en-US" sz="1300" dirty="0"/>
+          </a:p>
+        </p:txBody>
+      </p:sp>
+      <p:graphicFrame>
+        <p:nvGraphicFramePr>
+          <p:cNvPr id="32" name="Table 0"/>
+          <p:cNvGraphicFramePr>
+            <a:graphicFrameLocks noGrp="1"/>
+          </p:cNvGraphicFramePr>
+          <p:nvPr>
+            <p:extLst>
+              <p:ext uri="{D42A27DB-BD31-4B8C-83A1-F6EECF244321}">
+                <p14:modId xmlns:p14="http://schemas.microsoft.com/office/powerpoint/2010/main" val="1579011935"/>
+              </p:ext>
+            </p:extLst>
+          </p:nvPr>
+        </p:nvGraphicFramePr>
+        <p:xfrm>
+          <a:off x="1138767" y="4321175"/>
+          <a:ext cx="9927167" cy="997942"/>
+        </p:xfrm>
+        <a:graphic>
+          <a:graphicData uri="http://schemas.openxmlformats.org/drawingml/2006/table">
+            <a:tbl>
+              <a:tblPr/>
+              <a:tblGrid>
+                <a:gridCol w="2382520"/>
+                <a:gridCol w="1786890"/>
+                <a:gridCol w="1786890"/>
+                <a:gridCol w="1389803"/>
+                <a:gridCol w="1191260"/>
+                <a:gridCol w="1389803"/>
+              </a:tblGrid>
+              <a:tr h="332647">
+                <a:tc>
+                  <a:txBody>
+                    <a:bodyPr/>
+                    <a:lstStyle/>
+                    <a:p>
+                      <a:pPr indent="0" marL="0">
+                        <a:lnSpc>
+                          <a:spcPts val="1680"/>
+                        </a:lnSpc>
+                        <a:buNone/>
+                      </a:pPr>
+                      <a:r>
+                        <a:rPr lang="en-US" sz="1200" b="1" dirty="0">
+                          <a:solidFill>
+                            <a:srgbClr val="94A3B8"/>
+                          </a:solidFill>
+                          <a:latin typeface="IBM Plex Sans" pitchFamily="34" charset="0"/>
+                          <a:ea typeface="IBM Plex Sans" pitchFamily="34" charset="-122"/>
+                          <a:cs typeface="IBM Plex Sans" pitchFamily="34" charset="-120"/>
+                        </a:rPr>
+                        <a:t>Fecha carga</a:t>
+                      </a:r>
+                      <a:endParaRPr lang="en-US" sz="1200" dirty="0">
+                        <a:latin typeface="IBM Plex Sans" charset="0"/>
+                        <a:ea typeface="IBM Plex Sans" charset="0"/>
+                        <a:cs typeface="IBM Plex Sans" charset="0"/>
+                      </a:endParaRPr>
+                    </a:p>
+                  </a:txBody>
+                  <a:tcPr marL="53340" marR="53340" marT="53340" marB="53340" anchor="t">
+                    <a:lnL w="12700" cap="flat" cmpd="sng" algn="ctr">
+                      <a:solidFill>
+                        <a:srgbClr val="121723"/>
+                      </a:solidFill>
+                      <a:prstDash val="solid"/>
+                      <a:round/>
+                      <a:headEnd type="none" w="med" len="med"/>
+                      <a:tailEnd type="none" w="med" len="med"/>
+                    </a:lnL>
+                    <a:lnR w="12700" cap="flat" cmpd="sng" algn="ctr">
+                      <a:solidFill>
+                        <a:srgbClr val="121721"/>
+                      </a:solidFill>
+                      <a:prstDash val="solid"/>
+                      <a:round/>
+                      <a:headEnd type="none" w="med" len="med"/>
+                      <a:tailEnd type="none" w="med" len="med"/>
+                    </a:lnR>
+                    <a:lnT w="12700" cap="flat" cmpd="sng" algn="ctr">
+                      <a:solidFill>
+                        <a:srgbClr val="121723"/>
+                      </a:solidFill>
+                      <a:prstDash val="solid"/>
+                      <a:round/>
+                      <a:headEnd type="none" w="med" len="med"/>
+                      <a:tailEnd type="none" w="med" len="med"/>
+                    </a:lnT>
+                    <a:lnB w="12700" cap="flat" cmpd="sng" algn="ctr">
+                      <a:solidFill>
+                        <a:srgbClr val="121721"/>
+                      </a:solidFill>
+                      <a:prstDash val="solid"/>
+                      <a:round/>
+                      <a:headEnd type="none" w="med" len="med"/>
+                      <a:tailEnd type="none" w="med" len="med"/>
+                    </a:lnB>
+                    <a:solidFill>
+                      <a:srgbClr val="111825"/>
+                    </a:solidFill>
+                  </a:tcPr>
+                </a:tc>
+                <a:tc>
+                  <a:txBody>
+                    <a:bodyPr/>
+                    <a:lstStyle/>
+                    <a:p>
+                      <a:pPr indent="0" marL="0">
+                        <a:lnSpc>
+                          <a:spcPts val="1680"/>
+                        </a:lnSpc>
+                        <a:buNone/>
+                      </a:pPr>
+                      <a:r>
+                        <a:rPr lang="en-US" sz="1200" b="1" dirty="0">
+                          <a:solidFill>
+                            <a:srgbClr val="94A3B8"/>
+                          </a:solidFill>
+                          <a:latin typeface="IBM Plex Sans" pitchFamily="34" charset="0"/>
+                          <a:ea typeface="IBM Plex Sans" pitchFamily="34" charset="-122"/>
+                          <a:cs typeface="IBM Plex Sans" pitchFamily="34" charset="-120"/>
+                        </a:rPr>
+                        <a:t>Archivo</a:t>
+                      </a:r>
+                      <a:endParaRPr lang="en-US" sz="1200" dirty="0">
+                        <a:latin typeface="IBM Plex Sans" charset="0"/>
+                        <a:ea typeface="IBM Plex Sans" charset="0"/>
+                        <a:cs typeface="IBM Plex Sans" charset="0"/>
+                      </a:endParaRPr>
+                    </a:p>
+                  </a:txBody>
+                  <a:tcPr marL="53340" marR="53340" marT="53340" marB="53340" anchor="t">
+                    <a:lnL w="12700" cap="flat" cmpd="sng" algn="ctr">
+                      <a:solidFill>
+                        <a:srgbClr val="121721"/>
+                      </a:solidFill>
+                      <a:prstDash val="solid"/>
+                      <a:round/>
+                      <a:headEnd type="none" w="med" len="med"/>
+                      <a:tailEnd type="none" w="med" len="med"/>
+                    </a:lnL>
+                    <a:lnR w="12700" cap="flat" cmpd="sng" algn="ctr">
+                      <a:solidFill>
+                        <a:srgbClr val="121721"/>
+                      </a:solidFill>
+                      <a:prstDash val="solid"/>
+                      <a:round/>
+                      <a:headEnd type="none" w="med" len="med"/>
+                      <a:tailEnd type="none" w="med" len="med"/>
+                    </a:lnR>
+                    <a:lnT w="12700" cap="flat" cmpd="sng" algn="ctr">
+                      <a:solidFill>
+                        <a:srgbClr val="121723"/>
+                      </a:solidFill>
+                      <a:prstDash val="solid"/>
+                      <a:round/>
+                      <a:headEnd type="none" w="med" len="med"/>
+                      <a:tailEnd type="none" w="med" len="med"/>
+                    </a:lnT>
+                    <a:lnB w="12700" cap="flat" cmpd="sng" algn="ctr">
+                      <a:solidFill>
+                        <a:srgbClr val="121721"/>
+                      </a:solidFill>
+                      <a:prstDash val="solid"/>
+                      <a:round/>
+                      <a:headEnd type="none" w="med" len="med"/>
+                      <a:tailEnd type="none" w="med" len="med"/>
+                    </a:lnB>
+                    <a:solidFill>
+                      <a:srgbClr val="111825"/>
+                    </a:solidFill>
+                  </a:tcPr>
+                </a:tc>
+                <a:tc>
+                  <a:txBody>
+                    <a:bodyPr/>
+                    <a:lstStyle/>
+                    <a:p>
+                      <a:pPr indent="0" marL="0">
+                        <a:lnSpc>
+                          <a:spcPts val="1680"/>
+                        </a:lnSpc>
+                        <a:buNone/>
+                      </a:pPr>
+                      <a:r>
+                        <a:rPr lang="en-US" sz="1200" b="1" dirty="0">
+                          <a:solidFill>
+                            <a:srgbClr val="94A3B8"/>
+                          </a:solidFill>
+                          <a:latin typeface="IBM Plex Sans" pitchFamily="34" charset="0"/>
+                          <a:ea typeface="IBM Plex Sans" pitchFamily="34" charset="-122"/>
+                          <a:cs typeface="IBM Plex Sans" pitchFamily="34" charset="-120"/>
+                        </a:rPr>
+                        <a:t>Cargó</a:t>
+                      </a:r>
+                      <a:endParaRPr lang="en-US" sz="1200" dirty="0">
+                        <a:latin typeface="IBM Plex Sans" charset="0"/>
+                        <a:ea typeface="IBM Plex Sans" charset="0"/>
+                        <a:cs typeface="IBM Plex Sans" charset="0"/>
+                      </a:endParaRPr>
+                    </a:p>
+                  </a:txBody>
+                  <a:tcPr marL="53340" marR="53340" marT="53340" marB="53340" anchor="t">
+                    <a:lnL w="12700" cap="flat" cmpd="sng" algn="ctr">
+                      <a:solidFill>
+                        <a:srgbClr val="121721"/>
+                      </a:solidFill>
+                      <a:prstDash val="solid"/>
+                      <a:round/>
+                      <a:headEnd type="none" w="med" len="med"/>
+                      <a:tailEnd type="none" w="med" len="med"/>
+                    </a:lnL>
+                    <a:lnR w="12700" cap="flat" cmpd="sng" algn="ctr">
+                      <a:solidFill>
+                        <a:srgbClr val="121721"/>
+                      </a:solidFill>
+                      <a:prstDash val="solid"/>
+                      <a:round/>
+                      <a:headEnd type="none" w="med" len="med"/>
+                      <a:tailEnd type="none" w="med" len="med"/>
+                    </a:lnR>
+                    <a:lnT w="12700" cap="flat" cmpd="sng" algn="ctr">
+                      <a:solidFill>
+                        <a:srgbClr val="121723"/>
+                      </a:solidFill>
+                      <a:prstDash val="solid"/>
+                      <a:round/>
+                      <a:headEnd type="none" w="med" len="med"/>
+                      <a:tailEnd type="none" w="med" len="med"/>
+                    </a:lnT>
+                    <a:lnB w="12700" cap="flat" cmpd="sng" algn="ctr">
+                      <a:solidFill>
+                        <a:srgbClr val="121721"/>
+                      </a:solidFill>
+                      <a:prstDash val="solid"/>
+                      <a:round/>
+                      <a:headEnd type="none" w="med" len="med"/>
+                      <a:tailEnd type="none" w="med" len="med"/>
+                    </a:lnB>
+                    <a:solidFill>
+                      <a:srgbClr val="111825"/>
+                    </a:solidFill>
+                  </a:tcPr>
+                </a:tc>
+                <a:tc>
+                  <a:txBody>
+                    <a:bodyPr/>
+                    <a:lstStyle/>
+                    <a:p>
+                      <a:pPr indent="0" marL="0">
+                        <a:lnSpc>
+                          <a:spcPts val="1680"/>
+                        </a:lnSpc>
+                        <a:buNone/>
+                      </a:pPr>
+                      <a:r>
+                        <a:rPr lang="en-US" sz="1200" b="1" dirty="0">
+                          <a:solidFill>
+                            <a:srgbClr val="94A3B8"/>
+                          </a:solidFill>
+                          <a:latin typeface="IBM Plex Sans" pitchFamily="34" charset="0"/>
+                          <a:ea typeface="IBM Plex Sans" pitchFamily="34" charset="-122"/>
+                          <a:cs typeface="IBM Plex Sans" pitchFamily="34" charset="-120"/>
+                        </a:rPr>
+                        <a:t>Insertadas</a:t>
+                      </a:r>
+                      <a:endParaRPr lang="en-US" sz="1200" dirty="0">
+                        <a:latin typeface="IBM Plex Sans" charset="0"/>
+                        <a:ea typeface="IBM Plex Sans" charset="0"/>
+                        <a:cs typeface="IBM Plex Sans" charset="0"/>
+                      </a:endParaRPr>
+                    </a:p>
+                  </a:txBody>
+                  <a:tcPr marL="53340" marR="53340" marT="53340" marB="53340" anchor="t">
+                    <a:lnL w="12700" cap="flat" cmpd="sng" algn="ctr">
+                      <a:solidFill>
+                        <a:srgbClr val="121721"/>
+                      </a:solidFill>
+                      <a:prstDash val="solid"/>
+                      <a:round/>
+                      <a:headEnd type="none" w="med" len="med"/>
+                      <a:tailEnd type="none" w="med" len="med"/>
+                    </a:lnL>
+                    <a:lnR w="12700" cap="flat" cmpd="sng" algn="ctr">
+                      <a:solidFill>
+                        <a:srgbClr val="121721"/>
+                      </a:solidFill>
+                      <a:prstDash val="solid"/>
+                      <a:round/>
+                      <a:headEnd type="none" w="med" len="med"/>
+                      <a:tailEnd type="none" w="med" len="med"/>
+                    </a:lnR>
+                    <a:lnT w="12700" cap="flat" cmpd="sng" algn="ctr">
+                      <a:solidFill>
+                        <a:srgbClr val="121723"/>
+                      </a:solidFill>
+                      <a:prstDash val="solid"/>
+                      <a:round/>
+                      <a:headEnd type="none" w="med" len="med"/>
+                      <a:tailEnd type="none" w="med" len="med"/>
+                    </a:lnT>
+                    <a:lnB w="12700" cap="flat" cmpd="sng" algn="ctr">
+                      <a:solidFill>
+                        <a:srgbClr val="121721"/>
+                      </a:solidFill>
+                      <a:prstDash val="solid"/>
+                      <a:round/>
+                      <a:headEnd type="none" w="med" len="med"/>
+                      <a:tailEnd type="none" w="med" len="med"/>
+                    </a:lnB>
+                    <a:solidFill>
+                      <a:srgbClr val="111825"/>
+                    </a:solidFill>
+                  </a:tcPr>
+                </a:tc>
+                <a:tc>
+                  <a:txBody>
+                    <a:bodyPr/>
+                    <a:lstStyle/>
+                    <a:p>
+                      <a:pPr indent="0" marL="0">
+                        <a:lnSpc>
+                          <a:spcPts val="1680"/>
+                        </a:lnSpc>
+                        <a:buNone/>
+                      </a:pPr>
+                      <a:r>
+                        <a:rPr lang="en-US" sz="1200" b="1" dirty="0">
+                          <a:solidFill>
+                            <a:srgbClr val="94A3B8"/>
+                          </a:solidFill>
+                          <a:latin typeface="IBM Plex Sans" pitchFamily="34" charset="0"/>
+                          <a:ea typeface="IBM Plex Sans" pitchFamily="34" charset="-122"/>
+                          <a:cs typeface="IBM Plex Sans" pitchFamily="34" charset="-120"/>
+                        </a:rPr>
+                        <a:t>Duplicadas</a:t>
+                      </a:r>
+                      <a:endParaRPr lang="en-US" sz="1200" dirty="0">
+                        <a:latin typeface="IBM Plex Sans" charset="0"/>
+                        <a:ea typeface="IBM Plex Sans" charset="0"/>
+                        <a:cs typeface="IBM Plex Sans" charset="0"/>
+                      </a:endParaRPr>
+                    </a:p>
+                  </a:txBody>
+                  <a:tcPr marL="53340" marR="53340" marT="53340" marB="53340" anchor="t">
+                    <a:lnL w="12700" cap="flat" cmpd="sng" algn="ctr">
+                      <a:solidFill>
+                        <a:srgbClr val="121721"/>
+                      </a:solidFill>
+                      <a:prstDash val="solid"/>
+                      <a:round/>
+                      <a:headEnd type="none" w="med" len="med"/>
+                      <a:tailEnd type="none" w="med" len="med"/>
+                    </a:lnL>
+                    <a:lnR w="12700" cap="flat" cmpd="sng" algn="ctr">
+                      <a:solidFill>
+                        <a:srgbClr val="121721"/>
+                      </a:solidFill>
+                      <a:prstDash val="solid"/>
+                      <a:round/>
+                      <a:headEnd type="none" w="med" len="med"/>
+                      <a:tailEnd type="none" w="med" len="med"/>
+                    </a:lnR>
+                    <a:lnT w="12700" cap="flat" cmpd="sng" algn="ctr">
+                      <a:solidFill>
+                        <a:srgbClr val="121723"/>
+                      </a:solidFill>
+                      <a:prstDash val="solid"/>
+                      <a:round/>
+                      <a:headEnd type="none" w="med" len="med"/>
+                      <a:tailEnd type="none" w="med" len="med"/>
+                    </a:lnT>
+                    <a:lnB w="12700" cap="flat" cmpd="sng" algn="ctr">
+                      <a:solidFill>
+                        <a:srgbClr val="121721"/>
+                      </a:solidFill>
+                      <a:prstDash val="solid"/>
+                      <a:round/>
+                      <a:headEnd type="none" w="med" len="med"/>
+                      <a:tailEnd type="none" w="med" len="med"/>
+                    </a:lnB>
+                    <a:solidFill>
+                      <a:srgbClr val="111825"/>
+                    </a:solidFill>
+                  </a:tcPr>
+                </a:tc>
+                <a:tc>
+                  <a:txBody>
+                    <a:bodyPr/>
+                    <a:lstStyle/>
+                    <a:p>
+                      <a:pPr indent="0" marL="0">
+                        <a:lnSpc>
+                          <a:spcPts val="1680"/>
+                        </a:lnSpc>
+                        <a:buNone/>
+                      </a:pPr>
+                      <a:r>
+                        <a:rPr lang="en-US" sz="1200" b="1" dirty="0">
+                          <a:solidFill>
+                            <a:srgbClr val="94A3B8"/>
+                          </a:solidFill>
+                          <a:latin typeface="IBM Plex Sans" pitchFamily="34" charset="0"/>
+                          <a:ea typeface="IBM Plex Sans" pitchFamily="34" charset="-122"/>
+                          <a:cs typeface="IBM Plex Sans" pitchFamily="34" charset="-120"/>
+                        </a:rPr>
+                        <a:t>Estado</a:t>
+                      </a:r>
+                      <a:endParaRPr lang="en-US" sz="1200" dirty="0">
+                        <a:latin typeface="IBM Plex Sans" charset="0"/>
+                        <a:ea typeface="IBM Plex Sans" charset="0"/>
+                        <a:cs typeface="IBM Plex Sans" charset="0"/>
+                      </a:endParaRPr>
+                    </a:p>
+                  </a:txBody>
+                  <a:tcPr marL="53340" marR="53340" marT="53340" marB="53340" anchor="t">
+                    <a:lnL w="12700" cap="flat" cmpd="sng" algn="ctr">
+                      <a:solidFill>
+                        <a:srgbClr val="121721"/>
+                      </a:solidFill>
+                      <a:prstDash val="solid"/>
+                      <a:round/>
+                      <a:headEnd type="none" w="med" len="med"/>
+                      <a:tailEnd type="none" w="med" len="med"/>
+                    </a:lnL>
+                    <a:lnR w="12700" cap="flat" cmpd="sng" algn="ctr">
+                      <a:solidFill>
+                        <a:srgbClr val="121721"/>
+                      </a:solidFill>
+                      <a:prstDash val="solid"/>
+                      <a:round/>
+                      <a:headEnd type="none" w="med" len="med"/>
+                      <a:tailEnd type="none" w="med" len="med"/>
+                    </a:lnR>
+                    <a:lnT w="12700" cap="flat" cmpd="sng" algn="ctr">
+                      <a:solidFill>
+                        <a:srgbClr val="121723"/>
+                      </a:solidFill>
+                      <a:prstDash val="solid"/>
+                      <a:round/>
+                      <a:headEnd type="none" w="med" len="med"/>
+                      <a:tailEnd type="none" w="med" len="med"/>
+                    </a:lnT>
+                    <a:lnB w="12700" cap="flat" cmpd="sng" algn="ctr">
+                      <a:solidFill>
+                        <a:srgbClr val="121721"/>
+                      </a:solidFill>
+                      <a:prstDash val="solid"/>
+                      <a:round/>
+                      <a:headEnd type="none" w="med" len="med"/>
+                      <a:tailEnd type="none" w="med" len="med"/>
+                    </a:lnB>
+                    <a:solidFill>
+                      <a:srgbClr val="111825"/>
+                    </a:solidFill>
+                  </a:tcPr>
+                </a:tc>
+              </a:tr>
+              <a:tr h="332647">
+                <a:tc>
+                  <a:txBody>
+                    <a:bodyPr/>
+                    <a:lstStyle/>
+                    <a:p>
+                      <a:pPr indent="0" marL="0">
+                        <a:lnSpc>
+                          <a:spcPts val="1680"/>
+                        </a:lnSpc>
+                        <a:buNone/>
+                      </a:pPr>
+                      <a:r>
+                        <a:rPr lang="en-US" sz="1200" dirty="0">
+                          <a:solidFill>
+                            <a:srgbClr val="CBD5E1"/>
+                          </a:solidFill>
+                          <a:latin typeface="IBM Plex Sans" pitchFamily="34" charset="0"/>
+                          <a:ea typeface="IBM Plex Sans" pitchFamily="34" charset="-122"/>
+                          <a:cs typeface="IBM Plex Sans" pitchFamily="34" charset="-120"/>
+                        </a:rPr>
+                        <a:t>07/10/2026 08:10</a:t>
+                      </a:r>
+                      <a:endParaRPr lang="en-US" sz="1200" dirty="0">
+                        <a:latin typeface="IBM Plex Sans" charset="0"/>
+                        <a:ea typeface="IBM Plex Sans" charset="0"/>
+                        <a:cs typeface="IBM Plex Sans" charset="0"/>
+                      </a:endParaRPr>
+                    </a:p>
+                  </a:txBody>
+                  <a:tcPr marL="53340" marR="53340" marT="53340" marB="53340" anchor="t">
+                    <a:lnL w="12700" cap="flat" cmpd="sng" algn="ctr">
+                      <a:solidFill>
+                        <a:srgbClr val="121723"/>
+                      </a:solidFill>
+                      <a:prstDash val="solid"/>
+                      <a:round/>
+                      <a:headEnd type="none" w="med" len="med"/>
+                      <a:tailEnd type="none" w="med" len="med"/>
+                    </a:lnL>
+                    <a:lnR w="12700" cap="flat" cmpd="sng" algn="ctr">
+                      <a:solidFill>
+                        <a:srgbClr val="121723"/>
+                      </a:solidFill>
+                      <a:prstDash val="solid"/>
+                      <a:round/>
+                      <a:headEnd type="none" w="med" len="med"/>
+                      <a:tailEnd type="none" w="med" len="med"/>
+                    </a:lnR>
+                    <a:lnT w="12700" cap="flat" cmpd="sng" algn="ctr">
+                      <a:solidFill>
+                        <a:srgbClr val="121721"/>
+                      </a:solidFill>
+                      <a:prstDash val="solid"/>
+                      <a:round/>
+                      <a:headEnd type="none" w="med" len="med"/>
+                      <a:tailEnd type="none" w="med" len="med"/>
+                    </a:lnT>
+                    <a:lnB w="12700" cap="flat" cmpd="sng" algn="ctr">
+                      <a:solidFill>
+                        <a:srgbClr val="121723"/>
+                      </a:solidFill>
+                      <a:prstDash val="solid"/>
+                      <a:round/>
+                      <a:headEnd type="none" w="med" len="med"/>
+                      <a:tailEnd type="none" w="med" len="med"/>
+                    </a:lnB>
+                  </a:tcPr>
+                </a:tc>
+                <a:tc>
+                  <a:txBody>
+                    <a:bodyPr/>
+                    <a:lstStyle/>
+                    <a:p>
+                      <a:pPr indent="0" marL="0">
+                        <a:lnSpc>
+                          <a:spcPts val="1680"/>
+                        </a:lnSpc>
+                        <a:buNone/>
+                      </a:pPr>
+                      <a:r>
+                        <a:rPr lang="en-US" sz="1200" dirty="0">
+                          <a:solidFill>
+                            <a:srgbClr val="CBD5E1"/>
+                          </a:solidFill>
+                          <a:latin typeface="IBM Plex Sans" pitchFamily="34" charset="0"/>
+                          <a:ea typeface="IBM Plex Sans" pitchFamily="34" charset="-122"/>
+                          <a:cs typeface="IBM Plex Sans" pitchFamily="34" charset="-120"/>
+                        </a:rPr>
+                        <a:t>6-10-2026.xlsx</a:t>
+                      </a:r>
+                      <a:endParaRPr lang="en-US" sz="1200" dirty="0">
+                        <a:latin typeface="IBM Plex Sans" charset="0"/>
+                        <a:ea typeface="IBM Plex Sans" charset="0"/>
+                        <a:cs typeface="IBM Plex Sans" charset="0"/>
+                      </a:endParaRPr>
+                    </a:p>
+                  </a:txBody>
+                  <a:tcPr marL="53340" marR="53340" marT="53340" marB="53340" anchor="t">
+                    <a:lnL w="12700" cap="flat" cmpd="sng" algn="ctr">
+                      <a:solidFill>
+                        <a:srgbClr val="121723"/>
+                      </a:solidFill>
+                      <a:prstDash val="solid"/>
+                      <a:round/>
+                      <a:headEnd type="none" w="med" len="med"/>
+                      <a:tailEnd type="none" w="med" len="med"/>
+                    </a:lnL>
+                    <a:lnR w="12700" cap="flat" cmpd="sng" algn="ctr">
+                      <a:solidFill>
+                        <a:srgbClr val="121723"/>
+                      </a:solidFill>
+                      <a:prstDash val="solid"/>
+                      <a:round/>
+                      <a:headEnd type="none" w="med" len="med"/>
+                      <a:tailEnd type="none" w="med" len="med"/>
+                    </a:lnR>
+                    <a:lnT w="12700" cap="flat" cmpd="sng" algn="ctr">
+                      <a:solidFill>
+                        <a:srgbClr val="121721"/>
+                      </a:solidFill>
+                      <a:prstDash val="solid"/>
+                      <a:round/>
+                      <a:headEnd type="none" w="med" len="med"/>
+                      <a:tailEnd type="none" w="med" len="med"/>
+                    </a:lnT>
+                    <a:lnB w="12700" cap="flat" cmpd="sng" algn="ctr">
+                      <a:solidFill>
+                        <a:srgbClr val="121723"/>
+                      </a:solidFill>
+                      <a:prstDash val="solid"/>
+                      <a:round/>
+                      <a:headEnd type="none" w="med" len="med"/>
+                      <a:tailEnd type="none" w="med" len="med"/>
+                    </a:lnB>
+                  </a:tcPr>
+                </a:tc>
+                <a:tc>
+                  <a:txBody>
+                    <a:bodyPr/>
+                    <a:lstStyle/>
+                    <a:p>
+                      <a:pPr indent="0" marL="0">
+                        <a:lnSpc>
+                          <a:spcPts val="1680"/>
+                        </a:lnSpc>
+                        <a:buNone/>
+                      </a:pPr>
+                      <a:r>
+                        <a:rPr lang="en-US" sz="1200" dirty="0">
+                          <a:solidFill>
+                            <a:srgbClr val="CBD5E1"/>
+                          </a:solidFill>
+                          <a:latin typeface="IBM Plex Sans" pitchFamily="34" charset="0"/>
+                          <a:ea typeface="IBM Plex Sans" pitchFamily="34" charset="-122"/>
+                          <a:cs typeface="IBM Plex Sans" pitchFamily="34" charset="-120"/>
+                        </a:rPr>
+                        <a:t>admin</a:t>
+                      </a:r>
+                      <a:endParaRPr lang="en-US" sz="1200" dirty="0">
+                        <a:latin typeface="IBM Plex Sans" charset="0"/>
+                        <a:ea typeface="IBM Plex Sans" charset="0"/>
+                        <a:cs typeface="IBM Plex Sans" charset="0"/>
+                      </a:endParaRPr>
+                    </a:p>
+                  </a:txBody>
+                  <a:tcPr marL="53340" marR="53340" marT="53340" marB="53340" anchor="t">
+                    <a:lnL w="12700" cap="flat" cmpd="sng" algn="ctr">
+                      <a:solidFill>
+                        <a:srgbClr val="121723"/>
+                      </a:solidFill>
+                      <a:prstDash val="solid"/>
+                      <a:round/>
+                      <a:headEnd type="none" w="med" len="med"/>
+                      <a:tailEnd type="none" w="med" len="med"/>
+                    </a:lnL>
+                    <a:lnR w="12700" cap="flat" cmpd="sng" algn="ctr">
+                      <a:solidFill>
+                        <a:srgbClr val="121723"/>
+                      </a:solidFill>
+                      <a:prstDash val="solid"/>
+                      <a:round/>
+                      <a:headEnd type="none" w="med" len="med"/>
+                      <a:tailEnd type="none" w="med" len="med"/>
+                    </a:lnR>
+                    <a:lnT w="12700" cap="flat" cmpd="sng" algn="ctr">
+                      <a:solidFill>
+                        <a:srgbClr val="121721"/>
+                      </a:solidFill>
+                      <a:prstDash val="solid"/>
+                      <a:round/>
+                      <a:headEnd type="none" w="med" len="med"/>
+                      <a:tailEnd type="none" w="med" len="med"/>
+                    </a:lnT>
+                    <a:lnB w="12700" cap="flat" cmpd="sng" algn="ctr">
+                      <a:solidFill>
+                        <a:srgbClr val="121723"/>
+                      </a:solidFill>
+                      <a:prstDash val="solid"/>
+                      <a:round/>
+                      <a:headEnd type="none" w="med" len="med"/>
+                      <a:tailEnd type="none" w="med" len="med"/>
+                    </a:lnB>
+                  </a:tcPr>
+                </a:tc>
+                <a:tc>
+                  <a:txBody>
+                    <a:bodyPr/>
+                    <a:lstStyle/>
+                    <a:p>
+                      <a:pPr indent="0" marL="0">
+                        <a:lnSpc>
+                          <a:spcPts val="1680"/>
+                        </a:lnSpc>
+                        <a:buNone/>
+                      </a:pPr>
+                      <a:r>
+                        <a:rPr lang="en-US" sz="1200" dirty="0">
+                          <a:solidFill>
+                            <a:srgbClr val="CBD5E1"/>
+                          </a:solidFill>
+                          <a:latin typeface="IBM Plex Sans" pitchFamily="34" charset="0"/>
+                          <a:ea typeface="IBM Plex Sans" pitchFamily="34" charset="-122"/>
+                          <a:cs typeface="IBM Plex Sans" pitchFamily="34" charset="-120"/>
+                        </a:rPr>
+                        <a:t>9.812</a:t>
+                      </a:r>
+                      <a:endParaRPr lang="en-US" sz="1200" dirty="0">
+                        <a:latin typeface="IBM Plex Sans" charset="0"/>
+                        <a:ea typeface="IBM Plex Sans" charset="0"/>
+                        <a:cs typeface="IBM Plex Sans" charset="0"/>
+                      </a:endParaRPr>
+                    </a:p>
+                  </a:txBody>
+                  <a:tcPr marL="53340" marR="53340" marT="53340" marB="53340" anchor="t">
+                    <a:lnL w="12700" cap="flat" cmpd="sng" algn="ctr">
+                      <a:solidFill>
+                        <a:srgbClr val="121723"/>
+                      </a:solidFill>
+                      <a:prstDash val="solid"/>
+                      <a:round/>
+                      <a:headEnd type="none" w="med" len="med"/>
+                      <a:tailEnd type="none" w="med" len="med"/>
+                    </a:lnL>
+                    <a:lnR w="12700" cap="flat" cmpd="sng" algn="ctr">
+                      <a:solidFill>
+                        <a:srgbClr val="121723"/>
+                      </a:solidFill>
+                      <a:prstDash val="solid"/>
+                      <a:round/>
+                      <a:headEnd type="none" w="med" len="med"/>
+                      <a:tailEnd type="none" w="med" len="med"/>
+                    </a:lnR>
+                    <a:lnT w="12700" cap="flat" cmpd="sng" algn="ctr">
+                      <a:solidFill>
+                        <a:srgbClr val="121721"/>
+                      </a:solidFill>
+                      <a:prstDash val="solid"/>
+                      <a:round/>
+                      <a:headEnd type="none" w="med" len="med"/>
+                      <a:tailEnd type="none" w="med" len="med"/>
+                    </a:lnT>
+                    <a:lnB w="12700" cap="flat" cmpd="sng" algn="ctr">
+                      <a:solidFill>
+                        <a:srgbClr val="121723"/>
+                      </a:solidFill>
+                      <a:prstDash val="solid"/>
+                      <a:round/>
+                      <a:headEnd type="none" w="med" len="med"/>
+                      <a:tailEnd type="none" w="med" len="med"/>
+                    </a:lnB>
+                  </a:tcPr>
+                </a:tc>
+                <a:tc>
+                  <a:txBody>
+                    <a:bodyPr/>
+                    <a:lstStyle/>
+                    <a:p>
+                      <a:pPr indent="0" marL="0">
+                        <a:lnSpc>
+                          <a:spcPts val="1680"/>
+                        </a:lnSpc>
+                        <a:buNone/>
+                      </a:pPr>
+                      <a:r>
+                        <a:rPr lang="en-US" sz="1200" dirty="0">
+                          <a:solidFill>
+                            <a:srgbClr val="CBD5E1"/>
+                          </a:solidFill>
+                          <a:latin typeface="IBM Plex Sans" pitchFamily="34" charset="0"/>
+                          <a:ea typeface="IBM Plex Sans" pitchFamily="34" charset="-122"/>
+                          <a:cs typeface="IBM Plex Sans" pitchFamily="34" charset="-120"/>
+                        </a:rPr>
+                        <a:t>0</a:t>
+                      </a:r>
+                      <a:endParaRPr lang="en-US" sz="1200" dirty="0">
+                        <a:latin typeface="IBM Plex Sans" charset="0"/>
+                        <a:ea typeface="IBM Plex Sans" charset="0"/>
+                        <a:cs typeface="IBM Plex Sans" charset="0"/>
+                      </a:endParaRPr>
+                    </a:p>
+                  </a:txBody>
+                  <a:tcPr marL="53340" marR="53340" marT="53340" marB="53340" anchor="t">
+                    <a:lnL w="12700" cap="flat" cmpd="sng" algn="ctr">
+                      <a:solidFill>
+                        <a:srgbClr val="121723"/>
+                      </a:solidFill>
+                      <a:prstDash val="solid"/>
+                      <a:round/>
+                      <a:headEnd type="none" w="med" len="med"/>
+                      <a:tailEnd type="none" w="med" len="med"/>
+                    </a:lnL>
+                    <a:lnR w="12700" cap="flat" cmpd="sng" algn="ctr">
+                      <a:solidFill>
+                        <a:srgbClr val="121723"/>
+                      </a:solidFill>
+                      <a:prstDash val="solid"/>
+                      <a:round/>
+                      <a:headEnd type="none" w="med" len="med"/>
+                      <a:tailEnd type="none" w="med" len="med"/>
+                    </a:lnR>
+                    <a:lnT w="12700" cap="flat" cmpd="sng" algn="ctr">
+                      <a:solidFill>
+                        <a:srgbClr val="121721"/>
+                      </a:solidFill>
+                      <a:prstDash val="solid"/>
+                      <a:round/>
+                      <a:headEnd type="none" w="med" len="med"/>
+                      <a:tailEnd type="none" w="med" len="med"/>
+                    </a:lnT>
+                    <a:lnB w="12700" cap="flat" cmpd="sng" algn="ctr">
+                      <a:solidFill>
+                        <a:srgbClr val="121723"/>
+                      </a:solidFill>
+                      <a:prstDash val="solid"/>
+                      <a:round/>
+                      <a:headEnd type="none" w="med" len="med"/>
+                      <a:tailEnd type="none" w="med" len="med"/>
+                    </a:lnB>
+                  </a:tcPr>
+                </a:tc>
+                <a:tc>
+                  <a:txBody>
+                    <a:bodyPr/>
+                    <a:lstStyle/>
+                    <a:p>
+                      <a:pPr indent="0" marL="0">
+                        <a:lnSpc>
+                          <a:spcPts val="1680"/>
+                        </a:lnSpc>
+                        <a:buNone/>
+                      </a:pPr>
+                      <a:r>
+                        <a:rPr lang="en-US" sz="1200" dirty="0">
+                          <a:solidFill>
+                            <a:srgbClr val="CBD5E1"/>
+                          </a:solidFill>
+                          <a:latin typeface="IBM Plex Sans" pitchFamily="34" charset="0"/>
+                          <a:ea typeface="IBM Plex Sans" pitchFamily="34" charset="-122"/>
+                          <a:cs typeface="IBM Plex Sans" pitchFamily="34" charset="-120"/>
+                        </a:rPr>
+                        <a:t>Cargado</a:t>
+                      </a:r>
+                      <a:endParaRPr lang="en-US" sz="1200" dirty="0">
+                        <a:latin typeface="IBM Plex Sans" charset="0"/>
+                        <a:ea typeface="IBM Plex Sans" charset="0"/>
+                        <a:cs typeface="IBM Plex Sans" charset="0"/>
+                      </a:endParaRPr>
+                    </a:p>
+                  </a:txBody>
+                  <a:tcPr marL="53340" marR="53340" marT="53340" marB="53340" anchor="t">
+                    <a:lnL w="12700" cap="flat" cmpd="sng" algn="ctr">
+                      <a:solidFill>
+                        <a:srgbClr val="121723"/>
+                      </a:solidFill>
+                      <a:prstDash val="solid"/>
+                      <a:round/>
+                      <a:headEnd type="none" w="med" len="med"/>
+                      <a:tailEnd type="none" w="med" len="med"/>
+                    </a:lnL>
+                    <a:lnR w="12700" cap="flat" cmpd="sng" algn="ctr">
+                      <a:solidFill>
+                        <a:srgbClr val="121723"/>
+                      </a:solidFill>
+                      <a:prstDash val="solid"/>
+                      <a:round/>
+                      <a:headEnd type="none" w="med" len="med"/>
+                      <a:tailEnd type="none" w="med" len="med"/>
+                    </a:lnR>
+                    <a:lnT w="12700" cap="flat" cmpd="sng" algn="ctr">
+                      <a:solidFill>
+                        <a:srgbClr val="121721"/>
+                      </a:solidFill>
+                      <a:prstDash val="solid"/>
+                      <a:round/>
+                      <a:headEnd type="none" w="med" len="med"/>
+                      <a:tailEnd type="none" w="med" len="med"/>
+                    </a:lnT>
+                    <a:lnB w="12700" cap="flat" cmpd="sng" algn="ctr">
+                      <a:solidFill>
+                        <a:srgbClr val="121723"/>
+                      </a:solidFill>
+                      <a:prstDash val="solid"/>
+                      <a:round/>
+                      <a:headEnd type="none" w="med" len="med"/>
+                      <a:tailEnd type="none" w="med" len="med"/>
+                    </a:lnB>
+                  </a:tcPr>
+                </a:tc>
+              </a:tr>
+              <a:tr h="332647">
+                <a:tc>
+                  <a:txBody>
+                    <a:bodyPr/>
+                    <a:lstStyle/>
+                    <a:p>
+                      <a:pPr indent="0" marL="0">
+                        <a:lnSpc>
+                          <a:spcPts val="1680"/>
+                        </a:lnSpc>
+                        <a:buNone/>
+                      </a:pPr>
+                      <a:r>
+                        <a:rPr lang="en-US" sz="1200" dirty="0">
+                          <a:solidFill>
+                            <a:srgbClr val="CBD5E1"/>
+                          </a:solidFill>
+                          <a:latin typeface="IBM Plex Sans" pitchFamily="34" charset="0"/>
+                          <a:ea typeface="IBM Plex Sans" pitchFamily="34" charset="-122"/>
+                          <a:cs typeface="IBM Plex Sans" pitchFamily="34" charset="-120"/>
+                        </a:rPr>
+                        <a:t>06/10/2026 08:05</a:t>
+                      </a:r>
+                      <a:endParaRPr lang="en-US" sz="1200" dirty="0">
+                        <a:latin typeface="IBM Plex Sans" charset="0"/>
+                        <a:ea typeface="IBM Plex Sans" charset="0"/>
+                        <a:cs typeface="IBM Plex Sans" charset="0"/>
+                      </a:endParaRPr>
+                    </a:p>
+                  </a:txBody>
+                  <a:tcPr marL="53340" marR="53340" marT="53340" marB="53340" anchor="t">
+                    <a:lnL w="12700" cap="flat" cmpd="sng" algn="ctr">
+                      <a:solidFill>
+                        <a:srgbClr val="121723"/>
+                      </a:solidFill>
+                      <a:prstDash val="solid"/>
+                      <a:round/>
+                      <a:headEnd type="none" w="med" len="med"/>
+                      <a:tailEnd type="none" w="med" len="med"/>
+                    </a:lnL>
+                    <a:lnR w="12700" cap="flat" cmpd="sng" algn="ctr">
+                      <a:solidFill>
+                        <a:srgbClr val="121723"/>
+                      </a:solidFill>
+                      <a:prstDash val="solid"/>
+                      <a:round/>
+                      <a:headEnd type="none" w="med" len="med"/>
+                      <a:tailEnd type="none" w="med" len="med"/>
+                    </a:lnR>
+                    <a:lnT w="12700" cap="flat" cmpd="sng" algn="ctr">
+                      <a:solidFill>
+                        <a:srgbClr val="121723"/>
+                      </a:solidFill>
+                      <a:prstDash val="solid"/>
+                      <a:round/>
+                      <a:headEnd type="none" w="med" len="med"/>
+                      <a:tailEnd type="none" w="med" len="med"/>
+                    </a:lnT>
+                    <a:lnB w="12700" cap="flat" cmpd="sng" algn="ctr">
+                      <a:solidFill>
+                        <a:srgbClr val="121723"/>
+                      </a:solidFill>
+                      <a:prstDash val="solid"/>
+                      <a:round/>
+                      <a:headEnd type="none" w="med" len="med"/>
+                      <a:tailEnd type="none" w="med" len="med"/>
+                    </a:lnB>
+                  </a:tcPr>
+                </a:tc>
+                <a:tc>
+                  <a:txBody>
+                    <a:bodyPr/>
+                    <a:lstStyle/>
+                    <a:p>
+                      <a:pPr indent="0" marL="0">
+                        <a:lnSpc>
+                          <a:spcPts val="1680"/>
+                        </a:lnSpc>
+                        <a:buNone/>
+                      </a:pPr>
+                      <a:r>
+                        <a:rPr lang="en-US" sz="1200" dirty="0">
+                          <a:solidFill>
+                            <a:srgbClr val="CBD5E1"/>
+                          </a:solidFill>
+                          <a:latin typeface="IBM Plex Sans" pitchFamily="34" charset="0"/>
+                          <a:ea typeface="IBM Plex Sans" pitchFamily="34" charset="-122"/>
+                          <a:cs typeface="IBM Plex Sans" pitchFamily="34" charset="-120"/>
+                        </a:rPr>
+                        <a:t>5-10-2026.xlsx</a:t>
+                      </a:r>
+                      <a:endParaRPr lang="en-US" sz="1200" dirty="0">
+                        <a:latin typeface="IBM Plex Sans" charset="0"/>
+                        <a:ea typeface="IBM Plex Sans" charset="0"/>
+                        <a:cs typeface="IBM Plex Sans" charset="0"/>
+                      </a:endParaRPr>
+                    </a:p>
+                  </a:txBody>
+                  <a:tcPr marL="53340" marR="53340" marT="53340" marB="53340" anchor="t">
+                    <a:lnL w="12700" cap="flat" cmpd="sng" algn="ctr">
+                      <a:solidFill>
+                        <a:srgbClr val="121723"/>
+                      </a:solidFill>
+                      <a:prstDash val="solid"/>
+                      <a:round/>
+                      <a:headEnd type="none" w="med" len="med"/>
+                      <a:tailEnd type="none" w="med" len="med"/>
+                    </a:lnL>
+                    <a:lnR w="12700" cap="flat" cmpd="sng" algn="ctr">
+                      <a:solidFill>
+                        <a:srgbClr val="121723"/>
+                      </a:solidFill>
+                      <a:prstDash val="solid"/>
+                      <a:round/>
+                      <a:headEnd type="none" w="med" len="med"/>
+                      <a:tailEnd type="none" w="med" len="med"/>
+                    </a:lnR>
+                    <a:lnT w="12700" cap="flat" cmpd="sng" algn="ctr">
+                      <a:solidFill>
+                        <a:srgbClr val="121723"/>
+                      </a:solidFill>
+                      <a:prstDash val="solid"/>
+                      <a:round/>
+                      <a:headEnd type="none" w="med" len="med"/>
+                      <a:tailEnd type="none" w="med" len="med"/>
+                    </a:lnT>
+                    <a:lnB w="12700" cap="flat" cmpd="sng" algn="ctr">
+                      <a:solidFill>
+                        <a:srgbClr val="121723"/>
+                      </a:solidFill>
+                      <a:prstDash val="solid"/>
+                      <a:round/>
+                      <a:headEnd type="none" w="med" len="med"/>
+                      <a:tailEnd type="none" w="med" len="med"/>
+                    </a:lnB>
+                  </a:tcPr>
+                </a:tc>
+                <a:tc>
+                  <a:txBody>
+                    <a:bodyPr/>
+                    <a:lstStyle/>
+                    <a:p>
+                      <a:pPr indent="0" marL="0">
+                        <a:lnSpc>
+                          <a:spcPts val="1680"/>
+                        </a:lnSpc>
+                        <a:buNone/>
+                      </a:pPr>
+                      <a:r>
+                        <a:rPr lang="en-US" sz="1200" dirty="0">
+                          <a:solidFill>
+                            <a:srgbClr val="CBD5E1"/>
+                          </a:solidFill>
+                          <a:latin typeface="IBM Plex Sans" pitchFamily="34" charset="0"/>
+                          <a:ea typeface="IBM Plex Sans" pitchFamily="34" charset="-122"/>
+                          <a:cs typeface="IBM Plex Sans" pitchFamily="34" charset="-120"/>
+                        </a:rPr>
+                        <a:t>admin</a:t>
+                      </a:r>
+                      <a:endParaRPr lang="en-US" sz="1200" dirty="0">
+                        <a:latin typeface="IBM Plex Sans" charset="0"/>
+                        <a:ea typeface="IBM Plex Sans" charset="0"/>
+                        <a:cs typeface="IBM Plex Sans" charset="0"/>
+                      </a:endParaRPr>
+                    </a:p>
+                  </a:txBody>
+                  <a:tcPr marL="53340" marR="53340" marT="53340" marB="53340" anchor="t">
+                    <a:lnL w="12700" cap="flat" cmpd="sng" algn="ctr">
+                      <a:solidFill>
+                        <a:srgbClr val="121723"/>
+                      </a:solidFill>
+                      <a:prstDash val="solid"/>
+                      <a:round/>
+                      <a:headEnd type="none" w="med" len="med"/>
+                      <a:tailEnd type="none" w="med" len="med"/>
+                    </a:lnL>
+                    <a:lnR w="12700" cap="flat" cmpd="sng" algn="ctr">
+                      <a:solidFill>
+                        <a:srgbClr val="121723"/>
+                      </a:solidFill>
+                      <a:prstDash val="solid"/>
+                      <a:round/>
+                      <a:headEnd type="none" w="med" len="med"/>
+                      <a:tailEnd type="none" w="med" len="med"/>
+                    </a:lnR>
+                    <a:lnT w="12700" cap="flat" cmpd="sng" algn="ctr">
+                      <a:solidFill>
+                        <a:srgbClr val="121723"/>
+                      </a:solidFill>
+                      <a:prstDash val="solid"/>
+                      <a:round/>
+                      <a:headEnd type="none" w="med" len="med"/>
+                      <a:tailEnd type="none" w="med" len="med"/>
+                    </a:lnT>
+                    <a:lnB w="12700" cap="flat" cmpd="sng" algn="ctr">
+                      <a:solidFill>
+                        <a:srgbClr val="121723"/>
+                      </a:solidFill>
+                      <a:prstDash val="solid"/>
+                      <a:round/>
+                      <a:headEnd type="none" w="med" len="med"/>
+                      <a:tailEnd type="none" w="med" len="med"/>
+                    </a:lnB>
+                  </a:tcPr>
+                </a:tc>
+                <a:tc>
+                  <a:txBody>
+                    <a:bodyPr/>
+                    <a:lstStyle/>
+                    <a:p>
+                      <a:pPr indent="0" marL="0">
+                        <a:lnSpc>
+                          <a:spcPts val="1680"/>
+                        </a:lnSpc>
+                        <a:buNone/>
+                      </a:pPr>
+                      <a:r>
+                        <a:rPr lang="en-US" sz="1200" dirty="0">
+                          <a:solidFill>
+                            <a:srgbClr val="CBD5E1"/>
+                          </a:solidFill>
+                          <a:latin typeface="IBM Plex Sans" pitchFamily="34" charset="0"/>
+                          <a:ea typeface="IBM Plex Sans" pitchFamily="34" charset="-122"/>
+                          <a:cs typeface="IBM Plex Sans" pitchFamily="34" charset="-120"/>
+                        </a:rPr>
+                        <a:t>9.779</a:t>
+                      </a:r>
+                      <a:endParaRPr lang="en-US" sz="1200" dirty="0">
+                        <a:latin typeface="IBM Plex Sans" charset="0"/>
+                        <a:ea typeface="IBM Plex Sans" charset="0"/>
+                        <a:cs typeface="IBM Plex Sans" charset="0"/>
+                      </a:endParaRPr>
+                    </a:p>
+                  </a:txBody>
+                  <a:tcPr marL="53340" marR="53340" marT="53340" marB="53340" anchor="t">
+                    <a:lnL w="12700" cap="flat" cmpd="sng" algn="ctr">
+                      <a:solidFill>
+                        <a:srgbClr val="121723"/>
+                      </a:solidFill>
+                      <a:prstDash val="solid"/>
+                      <a:round/>
+                      <a:headEnd type="none" w="med" len="med"/>
+                      <a:tailEnd type="none" w="med" len="med"/>
+                    </a:lnL>
+                    <a:lnR w="12700" cap="flat" cmpd="sng" algn="ctr">
+                      <a:solidFill>
+                        <a:srgbClr val="121723"/>
+                      </a:solidFill>
+                      <a:prstDash val="solid"/>
+                      <a:round/>
+                      <a:headEnd type="none" w="med" len="med"/>
+                      <a:tailEnd type="none" w="med" len="med"/>
+                    </a:lnR>
+                    <a:lnT w="12700" cap="flat" cmpd="sng" algn="ctr">
+                      <a:solidFill>
+                        <a:srgbClr val="121723"/>
+                      </a:solidFill>
+                      <a:prstDash val="solid"/>
+                      <a:round/>
+                      <a:headEnd type="none" w="med" len="med"/>
+                      <a:tailEnd type="none" w="med" len="med"/>
+                    </a:lnT>
+                    <a:lnB w="12700" cap="flat" cmpd="sng" algn="ctr">
+                      <a:solidFill>
+                        <a:srgbClr val="121723"/>
+                      </a:solidFill>
+                      <a:prstDash val="solid"/>
+                      <a:round/>
+                      <a:headEnd type="none" w="med" len="med"/>
+                      <a:tailEnd type="none" w="med" len="med"/>
+                    </a:lnB>
+                  </a:tcPr>
+                </a:tc>
+                <a:tc>
+                  <a:txBody>
+                    <a:bodyPr/>
+                    <a:lstStyle/>
+                    <a:p>
+                      <a:pPr indent="0" marL="0">
+                        <a:lnSpc>
+                          <a:spcPts val="1680"/>
+                        </a:lnSpc>
+                        <a:buNone/>
+                      </a:pPr>
+                      <a:r>
+                        <a:rPr lang="en-US" sz="1200" dirty="0">
+                          <a:solidFill>
+                            <a:srgbClr val="CBD5E1"/>
+                          </a:solidFill>
+                          <a:latin typeface="IBM Plex Sans" pitchFamily="34" charset="0"/>
+                          <a:ea typeface="IBM Plex Sans" pitchFamily="34" charset="-122"/>
+                          <a:cs typeface="IBM Plex Sans" pitchFamily="34" charset="-120"/>
+                        </a:rPr>
+                        <a:t>0</a:t>
+                      </a:r>
+                      <a:endParaRPr lang="en-US" sz="1200" dirty="0">
+                        <a:latin typeface="IBM Plex Sans" charset="0"/>
+                        <a:ea typeface="IBM Plex Sans" charset="0"/>
+                        <a:cs typeface="IBM Plex Sans" charset="0"/>
+                      </a:endParaRPr>
+                    </a:p>
+                  </a:txBody>
+                  <a:tcPr marL="53340" marR="53340" marT="53340" marB="53340" anchor="t">
+                    <a:lnL w="12700" cap="flat" cmpd="sng" algn="ctr">
+                      <a:solidFill>
+                        <a:srgbClr val="121723"/>
+                      </a:solidFill>
+                      <a:prstDash val="solid"/>
+                      <a:round/>
+                      <a:headEnd type="none" w="med" len="med"/>
+                      <a:tailEnd type="none" w="med" len="med"/>
+                    </a:lnL>
+                    <a:lnR w="12700" cap="flat" cmpd="sng" algn="ctr">
+                      <a:solidFill>
+                        <a:srgbClr val="121723"/>
+                      </a:solidFill>
+                      <a:prstDash val="solid"/>
+                      <a:round/>
+                      <a:headEnd type="none" w="med" len="med"/>
+                      <a:tailEnd type="none" w="med" len="med"/>
+                    </a:lnR>
+                    <a:lnT w="12700" cap="flat" cmpd="sng" algn="ctr">
+                      <a:solidFill>
+                        <a:srgbClr val="121723"/>
+                      </a:solidFill>
+                      <a:prstDash val="solid"/>
+                      <a:round/>
+                      <a:headEnd type="none" w="med" len="med"/>
+                      <a:tailEnd type="none" w="med" len="med"/>
+                    </a:lnT>
+                    <a:lnB w="12700" cap="flat" cmpd="sng" algn="ctr">
+                      <a:solidFill>
+                        <a:srgbClr val="121723"/>
+                      </a:solidFill>
+                      <a:prstDash val="solid"/>
+                      <a:round/>
+                      <a:headEnd type="none" w="med" len="med"/>
+                      <a:tailEnd type="none" w="med" len="med"/>
+                    </a:lnB>
+                  </a:tcPr>
+                </a:tc>
+                <a:tc>
+                  <a:txBody>
+                    <a:bodyPr/>
+                    <a:lstStyle/>
+                    <a:p>
+                      <a:pPr indent="0" marL="0">
+                        <a:lnSpc>
+                          <a:spcPts val="1680"/>
+                        </a:lnSpc>
+                        <a:buNone/>
+                      </a:pPr>
+                      <a:r>
+                        <a:rPr lang="en-US" sz="1200" dirty="0">
+                          <a:solidFill>
+                            <a:srgbClr val="CBD5E1"/>
+                          </a:solidFill>
+                          <a:latin typeface="IBM Plex Sans" pitchFamily="34" charset="0"/>
+                          <a:ea typeface="IBM Plex Sans" pitchFamily="34" charset="-122"/>
+                          <a:cs typeface="IBM Plex Sans" pitchFamily="34" charset="-120"/>
+                        </a:rPr>
+                        <a:t>Cargado</a:t>
+                      </a:r>
+                      <a:endParaRPr lang="en-US" sz="1200" dirty="0">
+                        <a:latin typeface="IBM Plex Sans" charset="0"/>
+                        <a:ea typeface="IBM Plex Sans" charset="0"/>
+                        <a:cs typeface="IBM Plex Sans" charset="0"/>
+                      </a:endParaRPr>
+                    </a:p>
+                  </a:txBody>
+                  <a:tcPr marL="53340" marR="53340" marT="53340" marB="53340" anchor="t">
+                    <a:lnL w="12700" cap="flat" cmpd="sng" algn="ctr">
+                      <a:solidFill>
+                        <a:srgbClr val="121723"/>
+                      </a:solidFill>
+                      <a:prstDash val="solid"/>
+                      <a:round/>
+                      <a:headEnd type="none" w="med" len="med"/>
+                      <a:tailEnd type="none" w="med" len="med"/>
+                    </a:lnL>
+                    <a:lnR w="12700" cap="flat" cmpd="sng" algn="ctr">
+                      <a:solidFill>
+                        <a:srgbClr val="121723"/>
+                      </a:solidFill>
+                      <a:prstDash val="solid"/>
+                      <a:round/>
+                      <a:headEnd type="none" w="med" len="med"/>
+                      <a:tailEnd type="none" w="med" len="med"/>
+                    </a:lnR>
+                    <a:lnT w="12700" cap="flat" cmpd="sng" algn="ctr">
+                      <a:solidFill>
+                        <a:srgbClr val="121723"/>
+                      </a:solidFill>
+                      <a:prstDash val="solid"/>
+                      <a:round/>
+                      <a:headEnd type="none" w="med" len="med"/>
+                      <a:tailEnd type="none" w="med" len="med"/>
+                    </a:lnT>
+                    <a:lnB w="12700" cap="flat" cmpd="sng" algn="ctr">
+                      <a:solidFill>
+                        <a:srgbClr val="121723"/>
+                      </a:solidFill>
+                      <a:prstDash val="solid"/>
+                      <a:round/>
+                      <a:headEnd type="none" w="med" len="med"/>
+                      <a:tailEnd type="none" w="med" len="med"/>
+                    </a:lnB>
+                  </a:tcPr>
+                </a:tc>
+              </a:tr>
+            </a:tbl>
+          </a:graphicData>
+        </a:graphic>
+      </p:graphicFrame>
+      <p:sp>
+        <p:nvSpPr>
+          <p:cNvPr id="33" name="Text 30"/>
+          <p:cNvSpPr/>
+          <p:nvPr/>
+        </p:nvSpPr>
+        <p:spPr>
+          <a:xfrm>
+            <a:off x="812800" y="6238280"/>
+            <a:ext cx="3958273" cy="238720"/>
+          </a:xfrm>
+          <a:prstGeom prst="rect">
+            <a:avLst/>
+          </a:prstGeom>
+          <a:noFill/>
+          <a:ln/>
+        </p:spPr>
+        <p:txBody>
+          <a:bodyPr wrap="square" lIns="0" tIns="0" rIns="0" bIns="0" rtlCol="0" anchor="t">
+            <a:normAutofit/>
+          </a:bodyPr>
+          <a:lstStyle/>
+          <a:p>
+            <a:pPr algn="l" indent="0" marL="0">
+              <a:lnSpc>
+                <a:spcPts val="1680"/>
+              </a:lnSpc>
+              <a:buNone/>
+            </a:pPr>
+            <a:r>
+              <a:rPr lang="en-US" sz="1200" dirty="0">
+                <a:solidFill>
+                  <a:srgbClr val="66758A"/>
+                </a:solidFill>
+                <a:latin typeface="IBM Plex Sans" pitchFamily="34" charset="0"/>
+                <a:ea typeface="IBM Plex Sans" pitchFamily="34" charset="-122"/>
+                <a:cs typeface="IBM Plex Sans" pitchFamily="34" charset="-120"/>
+              </a:rPr>
+              <a:t>PW Extended App · Iniciativa en desarrollo</a:t>
+            </a:r>
+            <a:endParaRPr lang="en-US" sz="1200" dirty="0"/>
+          </a:p>
+        </p:txBody>
+      </p:sp>
+      <p:sp>
+        <p:nvSpPr>
+          <p:cNvPr id="34" name="Text 31"/>
+          <p:cNvSpPr/>
+          <p:nvPr/>
+        </p:nvSpPr>
+        <p:spPr>
+          <a:xfrm>
+            <a:off x="11145507" y="6238280"/>
+            <a:ext cx="233693" cy="238720"/>
+          </a:xfrm>
+          <a:prstGeom prst="rect">
+            <a:avLst/>
+          </a:prstGeom>
+          <a:noFill/>
+          <a:ln/>
+        </p:spPr>
+        <p:txBody>
+          <a:bodyPr wrap="square" lIns="0" tIns="0" rIns="0" bIns="0" rtlCol="0" anchor="t">
+            <a:normAutofit/>
+          </a:bodyPr>
+          <a:lstStyle/>
+          <a:p>
+            <a:pPr algn="r" indent="0" marL="0">
+              <a:lnSpc>
+                <a:spcPts val="1680"/>
+              </a:lnSpc>
+              <a:buNone/>
+            </a:pPr>
+            <a:r>
+              <a:rPr lang="en-US" sz="1200" dirty="0">
+                <a:solidFill>
+                  <a:srgbClr val="66758A"/>
+                </a:solidFill>
+                <a:latin typeface="IBM Plex Sans" pitchFamily="34" charset="0"/>
+                <a:ea typeface="IBM Plex Sans" pitchFamily="34" charset="-122"/>
+                <a:cs typeface="IBM Plex Sans" pitchFamily="34" charset="-120"/>
+              </a:rPr>
+              <a:t>18</a:t>
             </a:r>
             <a:endParaRPr lang="en-US" sz="1200" dirty="0"/>
           </a:p>
@@ -15804,7 +20697,7 @@
                 <a:ea typeface="IBM Plex Sans" pitchFamily="34" charset="-122"/>
                 <a:cs typeface="IBM Plex Sans" pitchFamily="34" charset="-120"/>
               </a:rPr>
-              <a:t>Usuarios Retirados DTU · Iniciativa en desarrollo</a:t>
+              <a:t>PW Extended App · Iniciativa en desarrollo</a:t>
             </a:r>
             <a:endParaRPr lang="en-US" sz="1200" dirty="0"/>
           </a:p>
@@ -16556,7 +21449,7 @@
                 <a:ea typeface="IBM Plex Sans" pitchFamily="34" charset="-122"/>
                 <a:cs typeface="IBM Plex Sans" pitchFamily="34" charset="-120"/>
               </a:rPr>
-              <a:t>Usuarios Retirados DTU · Iniciativa en desarrollo</a:t>
+              <a:t>PW Extended App · Iniciativa en desarrollo</a:t>
             </a:r>
             <a:endParaRPr lang="en-US" sz="1200" dirty="0"/>
           </a:p>
@@ -17628,7 +22521,7 @@
                 <a:ea typeface="IBM Plex Sans" pitchFamily="34" charset="-122"/>
                 <a:cs typeface="IBM Plex Sans" pitchFamily="34" charset="-120"/>
               </a:rPr>
-              <a:t>Usuarios Retirados DTU · Iniciativa en desarrollo</a:t>
+              <a:t>PW Extended App · Iniciativa en desarrollo</a:t>
             </a:r>
             <a:endParaRPr lang="en-US" sz="1200" dirty="0"/>
           </a:p>
@@ -17750,7 +22643,7 @@
                 <a:ea typeface="IBM Plex Sans" pitchFamily="34" charset="-122"/>
                 <a:cs typeface="IBM Plex Sans" pitchFamily="34" charset="-120"/>
               </a:rPr>
-              <a:t>Cómo llegamos hasta aquí: cinco fases</a:t>
+              <a:t>Cómo llegamos hasta aquí: seis fases</a:t>
             </a:r>
             <a:endParaRPr lang="en-US" sz="3200" dirty="0"/>
           </a:p>
@@ -18636,7 +23529,7 @@
                 <a:ea typeface="IBM Plex Mono" pitchFamily="49" charset="-122"/>
                 <a:cs typeface="IBM Plex Mono" pitchFamily="49" charset="-120"/>
               </a:rPr>
-              <a:t>EN PROCESO</a:t>
+              <a:t>FASE 6</a:t>
             </a:r>
             <a:endParaRPr lang="en-US" sz="1200" dirty="0"/>
           </a:p>
@@ -18680,7 +23573,7 @@
                 <a:ea typeface="IBM Plex Sans" pitchFamily="34" charset="-122"/>
                 <a:cs typeface="IBM Plex Sans" pitchFamily="34" charset="-120"/>
               </a:rPr>
-              <a:t>Piloto y automatización</a:t>
+              <a:t>PW Extended App</a:t>
             </a:r>
             <a:endParaRPr lang="en-US" sz="1500" dirty="0"/>
           </a:p>
@@ -18724,7 +23617,7 @@
                 <a:ea typeface="IBM Plex Sans" pitchFamily="34" charset="-122"/>
                 <a:cs typeface="IBM Plex Sans" pitchFamily="34" charset="-120"/>
               </a:rPr>
-              <a:t>Validar en operación real y seguir mejorando.</a:t>
+              <a:t>Plataforma por módulos: DTU y Ocupación Edificios.</a:t>
             </a:r>
             <a:endParaRPr lang="en-US" sz="1200" dirty="0"/>
           </a:p>
@@ -18768,7 +23661,7 @@
                 <a:ea typeface="IBM Plex Sans" pitchFamily="34" charset="-122"/>
                 <a:cs typeface="IBM Plex Sans" pitchFamily="34" charset="-120"/>
               </a:rPr>
-              <a:t>Usuarios Retirados DTU · Iniciativa en desarrollo</a:t>
+              <a:t>PW Extended App · Iniciativa en desarrollo</a:t>
             </a:r>
             <a:endParaRPr lang="en-US" sz="1200" dirty="0"/>
           </a:p>
@@ -18888,7 +23781,7 @@
                 <a:ea typeface="IBM Plex Mono" pitchFamily="49" charset="-122"/>
                 <a:cs typeface="IBM Plex Mono" pitchFamily="49" charset="-120"/>
               </a:rPr>
-              <a:t>FASE 1 DE 5</a:t>
+              <a:t>FASE 1 DE 6</a:t>
             </a:r>
             <a:endParaRPr lang="en-US" sz="1200" dirty="0"/>
           </a:p>
@@ -19328,7 +24221,7 @@
                 <a:ea typeface="IBM Plex Sans" pitchFamily="34" charset="-122"/>
                 <a:cs typeface="IBM Plex Sans" pitchFamily="34" charset="-120"/>
               </a:rPr>
-              <a:t>Usuarios Retirados DTU · Iniciativa en desarrollo</a:t>
+              <a:t>PW Extended App · Iniciativa en desarrollo</a:t>
             </a:r>
             <a:endParaRPr lang="en-US" sz="1200" dirty="0"/>
           </a:p>
@@ -19448,7 +24341,7 @@
                 <a:ea typeface="IBM Plex Mono" pitchFamily="49" charset="-122"/>
                 <a:cs typeface="IBM Plex Mono" pitchFamily="49" charset="-120"/>
               </a:rPr>
-              <a:t>FASE 2 DE 5</a:t>
+              <a:t>FASE 2 DE 6</a:t>
             </a:r>
             <a:endParaRPr lang="en-US" sz="1200" dirty="0"/>
           </a:p>
@@ -19867,7 +24760,7 @@
                 <a:ea typeface="IBM Plex Sans" pitchFamily="34" charset="-122"/>
                 <a:cs typeface="IBM Plex Sans" pitchFamily="34" charset="-120"/>
               </a:rPr>
-              <a:t>Usuarios Retirados DTU · Iniciativa en desarrollo</a:t>
+              <a:t>PW Extended App · Iniciativa en desarrollo</a:t>
             </a:r>
             <a:endParaRPr lang="en-US" sz="1200" dirty="0"/>
           </a:p>
@@ -19987,7 +24880,7 @@
                 <a:ea typeface="IBM Plex Mono" pitchFamily="49" charset="-122"/>
                 <a:cs typeface="IBM Plex Mono" pitchFamily="49" charset="-120"/>
               </a:rPr>
-              <a:t>FASE 3 DE 5</a:t>
+              <a:t>FASE 3 DE 6</a:t>
             </a:r>
             <a:endParaRPr lang="en-US" sz="1200" dirty="0"/>
           </a:p>
@@ -20427,7 +25320,7 @@
                 <a:ea typeface="IBM Plex Sans" pitchFamily="34" charset="-122"/>
                 <a:cs typeface="IBM Plex Sans" pitchFamily="34" charset="-120"/>
               </a:rPr>
-              <a:t>Usuarios Retirados DTU · Iniciativa en desarrollo</a:t>
+              <a:t>PW Extended App · Iniciativa en desarrollo</a:t>
             </a:r>
             <a:endParaRPr lang="en-US" sz="1200" dirty="0"/>
           </a:p>
